--- a/Docs/MLMI_Presentation.pptx
+++ b/Docs/MLMI_Presentation.pptx
@@ -5,7 +5,7 @@
     <p:sldMasterId id="2147483648" r:id="rId1"/>
   </p:sldMasterIdLst>
   <p:notesMasterIdLst>
-    <p:notesMasterId r:id="rId33"/>
+    <p:notesMasterId r:id="rId25"/>
   </p:notesMasterIdLst>
   <p:sldIdLst>
     <p:sldId id="256" r:id="rId2"/>
@@ -24,21 +24,13 @@
     <p:sldId id="859" r:id="rId15"/>
     <p:sldId id="860" r:id="rId16"/>
     <p:sldId id="862" r:id="rId17"/>
-    <p:sldId id="861" r:id="rId18"/>
-    <p:sldId id="863" r:id="rId19"/>
-    <p:sldId id="870" r:id="rId20"/>
-    <p:sldId id="871" r:id="rId21"/>
-    <p:sldId id="872" r:id="rId22"/>
-    <p:sldId id="879" r:id="rId23"/>
-    <p:sldId id="878" r:id="rId24"/>
-    <p:sldId id="877" r:id="rId25"/>
-    <p:sldId id="876" r:id="rId26"/>
-    <p:sldId id="875" r:id="rId27"/>
-    <p:sldId id="874" r:id="rId28"/>
-    <p:sldId id="864" r:id="rId29"/>
-    <p:sldId id="865" r:id="rId30"/>
-    <p:sldId id="866" r:id="rId31"/>
-    <p:sldId id="867" r:id="rId32"/>
+    <p:sldId id="870" r:id="rId18"/>
+    <p:sldId id="879" r:id="rId19"/>
+    <p:sldId id="876" r:id="rId20"/>
+    <p:sldId id="864" r:id="rId21"/>
+    <p:sldId id="865" r:id="rId22"/>
+    <p:sldId id="866" r:id="rId23"/>
+    <p:sldId id="867" r:id="rId24"/>
   </p:sldIdLst>
   <p:sldSz cx="12192000" cy="6858000"/>
   <p:notesSz cx="6858000" cy="9144000"/>
@@ -1051,7 +1043,7 @@
           <a:p>
             <a:fld id="{37EF4DF4-0195-D44C-96C4-BD862AF360A4}" type="datetimeFigureOut">
               <a:rPr lang="en-US" smtClean="0"/>
-              <a:t>10/31/2025</a:t>
+              <a:t>11/11/2025</a:t>
             </a:fld>
             <a:endParaRPr lang="en-US"/>
           </a:p>
@@ -2193,7 +2185,7 @@
           <a:p>
             <a:fld id="{FE3190BE-3770-7749-B933-E635DFD518FC}" type="datetime1">
               <a:rPr lang="en-IN" smtClean="0"/>
-              <a:t>31-10-2025</a:t>
+              <a:t>11-11-2025</a:t>
             </a:fld>
             <a:endParaRPr lang="en-US"/>
           </a:p>
@@ -2380,7 +2372,7 @@
           <a:p>
             <a:fld id="{3DC01BA3-39C9-E645-97E5-D8540B7264E3}" type="datetime1">
               <a:rPr lang="en-IN" smtClean="0"/>
-              <a:t>31-10-2025</a:t>
+              <a:t>11-11-2025</a:t>
             </a:fld>
             <a:endParaRPr lang="en-US"/>
           </a:p>
@@ -2590,7 +2582,7 @@
           <a:p>
             <a:fld id="{E09B4B17-415B-274D-A45B-51F223E841D3}" type="datetime1">
               <a:rPr lang="en-IN" smtClean="0"/>
-              <a:t>31-10-2025</a:t>
+              <a:t>11-11-2025</a:t>
             </a:fld>
             <a:endParaRPr lang="en-US"/>
           </a:p>
@@ -3003,7 +2995,7 @@
           <a:p>
             <a:fld id="{A7C6809D-0EEB-1749-A0D6-8C7CA51030DC}" type="datetime1">
               <a:rPr lang="en-IN" smtClean="0"/>
-              <a:t>31-10-2025</a:t>
+              <a:t>11-11-2025</a:t>
             </a:fld>
             <a:endParaRPr lang="en-US"/>
           </a:p>
@@ -3345,7 +3337,7 @@
           <a:p>
             <a:fld id="{129E1A18-DB2E-4340-A8A3-F43A40F63AFA}" type="datetime1">
               <a:rPr lang="en-IN" smtClean="0"/>
-              <a:t>31-10-2025</a:t>
+              <a:t>11-11-2025</a:t>
             </a:fld>
             <a:endParaRPr lang="en-US"/>
           </a:p>
@@ -3665,7 +3657,7 @@
           <a:p>
             <a:fld id="{7BADA4AD-5BD9-1A41-9BCD-06FEC1A78D4A}" type="datetime1">
               <a:rPr lang="en-IN" smtClean="0"/>
-              <a:t>31-10-2025</a:t>
+              <a:t>11-11-2025</a:t>
             </a:fld>
             <a:endParaRPr lang="en-US"/>
           </a:p>
@@ -4094,7 +4086,7 @@
           <a:p>
             <a:fld id="{F4D6A687-F0E8-4848-A600-D891EA72462B}" type="datetime1">
               <a:rPr lang="en-IN" smtClean="0"/>
-              <a:t>31-10-2025</a:t>
+              <a:t>11-11-2025</a:t>
             </a:fld>
             <a:endParaRPr lang="en-US"/>
           </a:p>
@@ -4236,7 +4228,7 @@
           <a:p>
             <a:fld id="{1EDD0A0F-1063-9547-BEEB-6D9DEF241FA2}" type="datetime1">
               <a:rPr lang="en-IN" smtClean="0"/>
-              <a:t>31-10-2025</a:t>
+              <a:t>11-11-2025</a:t>
             </a:fld>
             <a:endParaRPr lang="en-US"/>
           </a:p>
@@ -4349,7 +4341,7 @@
           <a:p>
             <a:fld id="{E6B39126-2844-2B4D-8BE8-C2D3B87CE1FF}" type="datetime1">
               <a:rPr lang="en-IN" smtClean="0"/>
-              <a:t>31-10-2025</a:t>
+              <a:t>11-11-2025</a:t>
             </a:fld>
             <a:endParaRPr lang="en-US"/>
           </a:p>
@@ -4678,7 +4670,7 @@
           <a:p>
             <a:fld id="{9CB4E208-90B2-D44B-9C9F-BD7B1BE91AA7}" type="datetime1">
               <a:rPr lang="en-IN" smtClean="0"/>
-              <a:t>31-10-2025</a:t>
+              <a:t>11-11-2025</a:t>
             </a:fld>
             <a:endParaRPr lang="en-US"/>
           </a:p>
@@ -4967,7 +4959,7 @@
           <a:p>
             <a:fld id="{65312664-DB3F-9245-BAB2-8275C04C3794}" type="datetime1">
               <a:rPr lang="en-IN" smtClean="0"/>
-              <a:t>31-10-2025</a:t>
+              <a:t>11-11-2025</a:t>
             </a:fld>
             <a:endParaRPr lang="en-US"/>
           </a:p>
@@ -5210,7 +5202,7 @@
           <a:p>
             <a:fld id="{3C6D9E38-8790-1C40-85CE-B1CAF3FEEF50}" type="datetime1">
               <a:rPr lang="en-IN" smtClean="0"/>
-              <a:t>31-10-2025</a:t>
+              <a:t>11-11-2025</a:t>
             </a:fld>
             <a:endParaRPr lang="en-US"/>
           </a:p>
@@ -5683,7 +5675,7 @@
             </a:pPr>
             <a:r>
               <a:rPr lang="en-US" sz="4000" dirty="0"/>
-              <a:t> MD simulation guided different Machine learning models for Predicting the mechanical properties of Ni-Cr based materials</a:t>
+              <a:t> MD simulation guided different Machine learning models for Predicting mechanical properties of Ni-Cr based materials</a:t>
             </a:r>
             <a:endParaRPr lang="en-IN" sz="4000" dirty="0">
               <a:effectLst/>
@@ -5755,8 +5747,8 @@
         </p:nvSpPr>
         <p:spPr>
           <a:xfrm>
-            <a:off x="3285569" y="2326505"/>
-            <a:ext cx="5255092" cy="1569660"/>
+            <a:off x="3536214" y="2326505"/>
+            <a:ext cx="4753802" cy="1200329"/>
           </a:xfrm>
           <a:prstGeom prst="rect">
             <a:avLst/>
@@ -5772,26 +5764,19 @@
             <a:pPr algn="ctr"/>
             <a:r>
               <a:rPr lang="en-IN" sz="2400" b="1" dirty="0"/>
-              <a:t>Chandu Cherupally</a:t>
+              <a:t>Chandu Cherupally       – 22CSB0C20</a:t>
             </a:r>
           </a:p>
           <a:p>
             <a:pPr algn="ctr"/>
             <a:r>
               <a:rPr lang="en-IN" sz="2400" b="1" dirty="0"/>
-              <a:t>Merugu Pavan Kalyan</a:t>
+              <a:t>Merugu Pavan Kalyan  – 22CSB0A19</a:t>
             </a:r>
           </a:p>
           <a:p>
             <a:pPr algn="ctr"/>
             <a:endParaRPr lang="en-IN" sz="2400" b="1" dirty="0"/>
-          </a:p>
-          <a:p>
-            <a:pPr algn="ctr"/>
-            <a:r>
-              <a:rPr lang="en-IN" sz="2400" b="1" dirty="0"/>
-              <a:t>Department  of Mechanical Engineering</a:t>
-            </a:r>
           </a:p>
         </p:txBody>
       </p:sp>
@@ -6000,41 +5985,6 @@
           </a:prstGeom>
         </p:spPr>
       </p:pic>
-      <p:sp>
-        <p:nvSpPr>
-          <p:cNvPr id="6" name="TextBox 5">
-            <a:extLst>
-              <a:ext uri="{FF2B5EF4-FFF2-40B4-BE49-F238E27FC236}">
-                <a16:creationId xmlns:a16="http://schemas.microsoft.com/office/drawing/2014/main" id="{8163C4C5-2A20-43C6-D193-4C562F799945}"/>
-              </a:ext>
-            </a:extLst>
-          </p:cNvPr>
-          <p:cNvSpPr txBox="1"/>
-          <p:nvPr/>
-        </p:nvSpPr>
-        <p:spPr>
-          <a:xfrm>
-            <a:off x="7352521" y="1791478"/>
-            <a:ext cx="3088433" cy="707886"/>
-          </a:xfrm>
-          <a:prstGeom prst="rect">
-            <a:avLst/>
-          </a:prstGeom>
-          <a:noFill/>
-        </p:spPr>
-        <p:txBody>
-          <a:bodyPr wrap="square" rtlCol="0">
-            <a:spAutoFit/>
-          </a:bodyPr>
-          <a:lstStyle/>
-          <a:p>
-            <a:r>
-              <a:rPr lang="en-IN" sz="2000" b="1" dirty="0"/>
-              <a:t>Joblib files generated after processing data</a:t>
-            </a:r>
-          </a:p>
-        </p:txBody>
-      </p:sp>
     </p:spTree>
     <p:extLst>
       <p:ext uri="{BB962C8B-B14F-4D97-AF65-F5344CB8AC3E}">
@@ -6100,41 +6050,6 @@
                                   </p:childTnLst>
                                 </p:cTn>
                               </p:par>
-                              <p:par>
-                                <p:cTn id="8" presetID="10" presetClass="entr" presetSubtype="0" fill="hold" grpId="0" nodeType="withEffect">
-                                  <p:stCondLst>
-                                    <p:cond delay="0"/>
-                                  </p:stCondLst>
-                                  <p:childTnLst>
-                                    <p:set>
-                                      <p:cBhvr>
-                                        <p:cTn id="9" dur="1" fill="hold">
-                                          <p:stCondLst>
-                                            <p:cond delay="0"/>
-                                          </p:stCondLst>
-                                        </p:cTn>
-                                        <p:tgtEl>
-                                          <p:spTgt spid="6"/>
-                                        </p:tgtEl>
-                                        <p:attrNameLst>
-                                          <p:attrName>style.visibility</p:attrName>
-                                        </p:attrNameLst>
-                                      </p:cBhvr>
-                                      <p:to>
-                                        <p:strVal val="visible"/>
-                                      </p:to>
-                                    </p:set>
-                                    <p:animEffect transition="in" filter="fade">
-                                      <p:cBhvr>
-                                        <p:cTn id="10" dur="500"/>
-                                        <p:tgtEl>
-                                          <p:spTgt spid="6"/>
-                                        </p:tgtEl>
-                                      </p:cBhvr>
-                                    </p:animEffect>
-                                  </p:childTnLst>
-                                </p:cTn>
-                              </p:par>
                             </p:childTnLst>
                           </p:cTn>
                         </p:par>
@@ -6162,9 +6077,6 @@
         </p:cTn>
       </p:par>
     </p:tnLst>
-    <p:bldLst>
-      <p:bldP spid="6" grpId="0"/>
-    </p:bldLst>
   </p:timing>
 </p:sld>
 </file>
@@ -6255,7 +6167,7 @@
                   <a:srgbClr val="FF0000"/>
                 </a:solidFill>
               </a:rPr>
-              <a:t>Models training and Evaluation</a:t>
+              <a:t>Models Training and Evaluation</a:t>
             </a:r>
           </a:p>
         </p:txBody>
@@ -6800,7 +6712,7 @@
                   <a:srgbClr val="FF0000"/>
                 </a:solidFill>
               </a:rPr>
-              <a:t>Models training and Evaluation</a:t>
+              <a:t>Models Training and Evaluation</a:t>
             </a:r>
           </a:p>
         </p:txBody>
@@ -6964,7 +6876,7 @@
                   <a:srgbClr val="FF0000"/>
                 </a:solidFill>
               </a:rPr>
-              <a:t>ML pipeline</a:t>
+              <a:t>ML Pipeline</a:t>
             </a:r>
           </a:p>
         </p:txBody>
@@ -9015,14 +8927,109 @@
         </p:blipFill>
         <p:spPr>
           <a:xfrm>
-            <a:off x="3125756" y="803211"/>
-            <a:ext cx="5438191" cy="5438191"/>
+            <a:off x="177284" y="1885563"/>
+            <a:ext cx="3769566" cy="3769566"/>
           </a:xfrm>
           <a:prstGeom prst="rect">
             <a:avLst/>
           </a:prstGeom>
         </p:spPr>
       </p:pic>
+      <p:pic>
+        <p:nvPicPr>
+          <p:cNvPr id="4" name="Picture 3">
+            <a:extLst>
+              <a:ext uri="{FF2B5EF4-FFF2-40B4-BE49-F238E27FC236}">
+                <a16:creationId xmlns:a16="http://schemas.microsoft.com/office/drawing/2014/main" id="{2B5BC07E-2F91-B434-A5F8-56D7E581C826}"/>
+              </a:ext>
+            </a:extLst>
+          </p:cNvPr>
+          <p:cNvPicPr>
+            <a:picLocks noChangeAspect="1"/>
+          </p:cNvPicPr>
+          <p:nvPr/>
+        </p:nvPicPr>
+        <p:blipFill>
+          <a:blip r:embed="rId3"/>
+          <a:stretch>
+            <a:fillRect/>
+          </a:stretch>
+        </p:blipFill>
+        <p:spPr>
+          <a:xfrm>
+            <a:off x="4475586" y="1885563"/>
+            <a:ext cx="3769566" cy="3769566"/>
+          </a:xfrm>
+          <a:prstGeom prst="rect">
+            <a:avLst/>
+          </a:prstGeom>
+        </p:spPr>
+      </p:pic>
+      <p:pic>
+        <p:nvPicPr>
+          <p:cNvPr id="5" name="Picture 4">
+            <a:extLst>
+              <a:ext uri="{FF2B5EF4-FFF2-40B4-BE49-F238E27FC236}">
+                <a16:creationId xmlns:a16="http://schemas.microsoft.com/office/drawing/2014/main" id="{B35EDF0B-4DCC-D7BF-6924-295D98928C25}"/>
+              </a:ext>
+            </a:extLst>
+          </p:cNvPr>
+          <p:cNvPicPr>
+            <a:picLocks noChangeAspect="1"/>
+          </p:cNvPicPr>
+          <p:nvPr/>
+        </p:nvPicPr>
+        <p:blipFill>
+          <a:blip r:embed="rId4"/>
+          <a:stretch>
+            <a:fillRect/>
+          </a:stretch>
+        </p:blipFill>
+        <p:spPr>
+          <a:xfrm>
+            <a:off x="8377154" y="1885563"/>
+            <a:ext cx="3769566" cy="3769566"/>
+          </a:xfrm>
+          <a:prstGeom prst="rect">
+            <a:avLst/>
+          </a:prstGeom>
+        </p:spPr>
+      </p:pic>
+      <p:sp>
+        <p:nvSpPr>
+          <p:cNvPr id="3" name="TextBox 2">
+            <a:extLst>
+              <a:ext uri="{FF2B5EF4-FFF2-40B4-BE49-F238E27FC236}">
+                <a16:creationId xmlns:a16="http://schemas.microsoft.com/office/drawing/2014/main" id="{7327D716-FE4C-2DEC-A6A7-5C99BC6F79A7}"/>
+              </a:ext>
+            </a:extLst>
+          </p:cNvPr>
+          <p:cNvSpPr txBox="1"/>
+          <p:nvPr/>
+        </p:nvSpPr>
+        <p:spPr>
+          <a:xfrm>
+            <a:off x="542077" y="1324946"/>
+            <a:ext cx="7090363" cy="400110"/>
+          </a:xfrm>
+          <a:prstGeom prst="rect">
+            <a:avLst/>
+          </a:prstGeom>
+          <a:noFill/>
+        </p:spPr>
+        <p:txBody>
+          <a:bodyPr wrap="square" rtlCol="0">
+            <a:spAutoFit/>
+          </a:bodyPr>
+          <a:lstStyle/>
+          <a:p>
+            <a:r>
+              <a:rPr lang="en-IN" sz="2000" dirty="0"/>
+              <a:t>Linear Regression Model: 	   Predicted v/s Actual Results</a:t>
+            </a:r>
+          </a:p>
+        </p:txBody>
+      </p:sp>
     </p:spTree>
     <p:extLst>
       <p:ext uri="{BB962C8B-B14F-4D97-AF65-F5344CB8AC3E}">
@@ -9037,286 +9044,6 @@
 </file>
 
 <file path=ppt/slides/slide17.xml><?xml version="1.0" encoding="utf-8"?>
-<p:sld xmlns:a="http://schemas.openxmlformats.org/drawingml/2006/main" xmlns:r="http://schemas.openxmlformats.org/officeDocument/2006/relationships" xmlns:p="http://schemas.openxmlformats.org/presentationml/2006/main">
-  <p:cSld>
-    <p:spTree>
-      <p:nvGrpSpPr>
-        <p:cNvPr id="1" name="">
-          <a:extLst>
-            <a:ext uri="{FF2B5EF4-FFF2-40B4-BE49-F238E27FC236}">
-              <a16:creationId xmlns:a16="http://schemas.microsoft.com/office/drawing/2014/main" id="{83CEE00D-9A7F-6661-A734-493A83E378A0}"/>
-            </a:ext>
-          </a:extLst>
-        </p:cNvPr>
-        <p:cNvGrpSpPr/>
-        <p:nvPr/>
-      </p:nvGrpSpPr>
-      <p:grpSpPr>
-        <a:xfrm>
-          <a:off x="0" y="0"/>
-          <a:ext cx="0" cy="0"/>
-          <a:chOff x="0" y="0"/>
-          <a:chExt cx="0" cy="0"/>
-        </a:xfrm>
-      </p:grpSpPr>
-      <p:sp>
-        <p:nvSpPr>
-          <p:cNvPr id="2" name="Slide Number Placeholder 1">
-            <a:extLst>
-              <a:ext uri="{FF2B5EF4-FFF2-40B4-BE49-F238E27FC236}">
-                <a16:creationId xmlns:a16="http://schemas.microsoft.com/office/drawing/2014/main" id="{EEC09DF6-95EF-3E0D-05F5-B9EA26126C41}"/>
-              </a:ext>
-            </a:extLst>
-          </p:cNvPr>
-          <p:cNvSpPr>
-            <a:spLocks noGrp="1"/>
-          </p:cNvSpPr>
-          <p:nvPr>
-            <p:ph type="sldNum" sz="quarter" idx="12"/>
-          </p:nvPr>
-        </p:nvSpPr>
-        <p:spPr>
-          <a:xfrm>
-            <a:off x="11525877" y="6404419"/>
-            <a:ext cx="620843" cy="365125"/>
-          </a:xfrm>
-        </p:spPr>
-        <p:txBody>
-          <a:bodyPr/>
-          <a:lstStyle/>
-          <a:p>
-            <a:fld id="{8FBEC28E-4BEC-434E-A174-17C0E8C4B2B2}" type="slidenum">
-              <a:rPr lang="en-US" smtClean="0"/>
-              <a:pPr/>
-              <a:t>17</a:t>
-            </a:fld>
-            <a:endParaRPr lang="en-US" dirty="0"/>
-          </a:p>
-        </p:txBody>
-      </p:sp>
-      <p:sp>
-        <p:nvSpPr>
-          <p:cNvPr id="10" name="TextBox 9">
-            <a:extLst>
-              <a:ext uri="{FF2B5EF4-FFF2-40B4-BE49-F238E27FC236}">
-                <a16:creationId xmlns:a16="http://schemas.microsoft.com/office/drawing/2014/main" id="{D6F432C8-104D-C9FC-0B7C-3B89F6AE0263}"/>
-              </a:ext>
-            </a:extLst>
-          </p:cNvPr>
-          <p:cNvSpPr txBox="1"/>
-          <p:nvPr/>
-        </p:nvSpPr>
-        <p:spPr>
-          <a:xfrm>
-            <a:off x="542078" y="84181"/>
-            <a:ext cx="5818771" cy="584775"/>
-          </a:xfrm>
-          <a:prstGeom prst="rect">
-            <a:avLst/>
-          </a:prstGeom>
-          <a:noFill/>
-        </p:spPr>
-        <p:txBody>
-          <a:bodyPr wrap="square" rtlCol="0">
-            <a:spAutoFit/>
-          </a:bodyPr>
-          <a:lstStyle/>
-          <a:p>
-            <a:r>
-              <a:rPr lang="en-US" sz="3200" b="1" dirty="0">
-                <a:solidFill>
-                  <a:srgbClr val="FF0000"/>
-                </a:solidFill>
-              </a:rPr>
-              <a:t>Plot Results</a:t>
-            </a:r>
-          </a:p>
-        </p:txBody>
-      </p:sp>
-      <p:pic>
-        <p:nvPicPr>
-          <p:cNvPr id="4" name="Picture 3">
-            <a:extLst>
-              <a:ext uri="{FF2B5EF4-FFF2-40B4-BE49-F238E27FC236}">
-                <a16:creationId xmlns:a16="http://schemas.microsoft.com/office/drawing/2014/main" id="{2B5BC07E-2F91-B434-A5F8-56D7E581C826}"/>
-              </a:ext>
-            </a:extLst>
-          </p:cNvPr>
-          <p:cNvPicPr>
-            <a:picLocks noChangeAspect="1"/>
-          </p:cNvPicPr>
-          <p:nvPr/>
-        </p:nvPicPr>
-        <p:blipFill>
-          <a:blip r:embed="rId2"/>
-          <a:stretch>
-            <a:fillRect/>
-          </a:stretch>
-        </p:blipFill>
-        <p:spPr>
-          <a:xfrm>
-            <a:off x="3116423" y="826537"/>
-            <a:ext cx="5391539" cy="5391539"/>
-          </a:xfrm>
-          <a:prstGeom prst="rect">
-            <a:avLst/>
-          </a:prstGeom>
-        </p:spPr>
-      </p:pic>
-    </p:spTree>
-    <p:extLst>
-      <p:ext uri="{BB962C8B-B14F-4D97-AF65-F5344CB8AC3E}">
-        <p14:creationId xmlns:p14="http://schemas.microsoft.com/office/powerpoint/2010/main" val="3976103017"/>
-      </p:ext>
-    </p:extLst>
-  </p:cSld>
-  <p:clrMapOvr>
-    <a:masterClrMapping/>
-  </p:clrMapOvr>
-</p:sld>
-</file>
-
-<file path=ppt/slides/slide18.xml><?xml version="1.0" encoding="utf-8"?>
-<p:sld xmlns:a="http://schemas.openxmlformats.org/drawingml/2006/main" xmlns:r="http://schemas.openxmlformats.org/officeDocument/2006/relationships" xmlns:p="http://schemas.openxmlformats.org/presentationml/2006/main">
-  <p:cSld>
-    <p:spTree>
-      <p:nvGrpSpPr>
-        <p:cNvPr id="1" name="">
-          <a:extLst>
-            <a:ext uri="{FF2B5EF4-FFF2-40B4-BE49-F238E27FC236}">
-              <a16:creationId xmlns:a16="http://schemas.microsoft.com/office/drawing/2014/main" id="{AFAF9A90-B6E8-23DB-CE79-0907A32F29DA}"/>
-            </a:ext>
-          </a:extLst>
-        </p:cNvPr>
-        <p:cNvGrpSpPr/>
-        <p:nvPr/>
-      </p:nvGrpSpPr>
-      <p:grpSpPr>
-        <a:xfrm>
-          <a:off x="0" y="0"/>
-          <a:ext cx="0" cy="0"/>
-          <a:chOff x="0" y="0"/>
-          <a:chExt cx="0" cy="0"/>
-        </a:xfrm>
-      </p:grpSpPr>
-      <p:sp>
-        <p:nvSpPr>
-          <p:cNvPr id="2" name="Slide Number Placeholder 1">
-            <a:extLst>
-              <a:ext uri="{FF2B5EF4-FFF2-40B4-BE49-F238E27FC236}">
-                <a16:creationId xmlns:a16="http://schemas.microsoft.com/office/drawing/2014/main" id="{055F7BEC-BD32-E317-D124-1DFD0835FDDD}"/>
-              </a:ext>
-            </a:extLst>
-          </p:cNvPr>
-          <p:cNvSpPr>
-            <a:spLocks noGrp="1"/>
-          </p:cNvSpPr>
-          <p:nvPr>
-            <p:ph type="sldNum" sz="quarter" idx="12"/>
-          </p:nvPr>
-        </p:nvSpPr>
-        <p:spPr>
-          <a:xfrm>
-            <a:off x="11525877" y="6404419"/>
-            <a:ext cx="620843" cy="365125"/>
-          </a:xfrm>
-        </p:spPr>
-        <p:txBody>
-          <a:bodyPr/>
-          <a:lstStyle/>
-          <a:p>
-            <a:fld id="{8FBEC28E-4BEC-434E-A174-17C0E8C4B2B2}" type="slidenum">
-              <a:rPr lang="en-US" smtClean="0"/>
-              <a:pPr/>
-              <a:t>18</a:t>
-            </a:fld>
-            <a:endParaRPr lang="en-US" dirty="0"/>
-          </a:p>
-        </p:txBody>
-      </p:sp>
-      <p:sp>
-        <p:nvSpPr>
-          <p:cNvPr id="10" name="TextBox 9">
-            <a:extLst>
-              <a:ext uri="{FF2B5EF4-FFF2-40B4-BE49-F238E27FC236}">
-                <a16:creationId xmlns:a16="http://schemas.microsoft.com/office/drawing/2014/main" id="{B8A8A296-CF4D-AA53-AB4A-2999D73FC48D}"/>
-              </a:ext>
-            </a:extLst>
-          </p:cNvPr>
-          <p:cNvSpPr txBox="1"/>
-          <p:nvPr/>
-        </p:nvSpPr>
-        <p:spPr>
-          <a:xfrm>
-            <a:off x="542078" y="84181"/>
-            <a:ext cx="5818771" cy="584775"/>
-          </a:xfrm>
-          <a:prstGeom prst="rect">
-            <a:avLst/>
-          </a:prstGeom>
-          <a:noFill/>
-        </p:spPr>
-        <p:txBody>
-          <a:bodyPr wrap="square" rtlCol="0">
-            <a:spAutoFit/>
-          </a:bodyPr>
-          <a:lstStyle/>
-          <a:p>
-            <a:r>
-              <a:rPr lang="en-US" sz="3200" b="1" dirty="0">
-                <a:solidFill>
-                  <a:srgbClr val="FF0000"/>
-                </a:solidFill>
-              </a:rPr>
-              <a:t>Plot Results</a:t>
-            </a:r>
-          </a:p>
-        </p:txBody>
-      </p:sp>
-      <p:pic>
-        <p:nvPicPr>
-          <p:cNvPr id="5" name="Picture 4">
-            <a:extLst>
-              <a:ext uri="{FF2B5EF4-FFF2-40B4-BE49-F238E27FC236}">
-                <a16:creationId xmlns:a16="http://schemas.microsoft.com/office/drawing/2014/main" id="{B35EDF0B-4DCC-D7BF-6924-295D98928C25}"/>
-              </a:ext>
-            </a:extLst>
-          </p:cNvPr>
-          <p:cNvPicPr>
-            <a:picLocks noChangeAspect="1"/>
-          </p:cNvPicPr>
-          <p:nvPr/>
-        </p:nvPicPr>
-        <p:blipFill>
-          <a:blip r:embed="rId2"/>
-          <a:stretch>
-            <a:fillRect/>
-          </a:stretch>
-        </p:blipFill>
-        <p:spPr>
-          <a:xfrm>
-            <a:off x="3040906" y="790254"/>
-            <a:ext cx="5498579" cy="5498579"/>
-          </a:xfrm>
-          <a:prstGeom prst="rect">
-            <a:avLst/>
-          </a:prstGeom>
-        </p:spPr>
-      </p:pic>
-    </p:spTree>
-    <p:extLst>
-      <p:ext uri="{BB962C8B-B14F-4D97-AF65-F5344CB8AC3E}">
-        <p14:creationId xmlns:p14="http://schemas.microsoft.com/office/powerpoint/2010/main" val="1579201708"/>
-      </p:ext>
-    </p:extLst>
-  </p:cSld>
-  <p:clrMapOvr>
-    <a:masterClrMapping/>
-  </p:clrMapOvr>
-</p:sld>
-</file>
-
-<file path=ppt/slides/slide19.xml><?xml version="1.0" encoding="utf-8"?>
 <p:sld xmlns:a="http://schemas.openxmlformats.org/drawingml/2006/main" xmlns:r="http://schemas.openxmlformats.org/officeDocument/2006/relationships" xmlns:p="http://schemas.openxmlformats.org/presentationml/2006/main">
   <p:cSld>
     <p:spTree>
@@ -9368,7 +9095,7 @@
             <a:fld id="{8FBEC28E-4BEC-434E-A174-17C0E8C4B2B2}" type="slidenum">
               <a:rPr lang="en-US" smtClean="0"/>
               <a:pPr/>
-              <a:t>19</a:t>
+              <a:t>17</a:t>
             </a:fld>
             <a:endParaRPr lang="en-US" dirty="0"/>
           </a:p>
@@ -9435,18 +9162,583 @@
         </p:blipFill>
         <p:spPr>
           <a:xfrm>
-            <a:off x="3329473" y="774441"/>
-            <a:ext cx="5533053" cy="5533053"/>
+            <a:off x="203668" y="1837024"/>
+            <a:ext cx="3788229" cy="3788229"/>
           </a:xfrm>
           <a:prstGeom prst="rect">
             <a:avLst/>
           </a:prstGeom>
         </p:spPr>
       </p:pic>
+      <p:pic>
+        <p:nvPicPr>
+          <p:cNvPr id="3" name="Picture 2">
+            <a:extLst>
+              <a:ext uri="{FF2B5EF4-FFF2-40B4-BE49-F238E27FC236}">
+                <a16:creationId xmlns:a16="http://schemas.microsoft.com/office/drawing/2014/main" id="{8466C4C7-AB67-51C3-BF8D-54B1EEDF766C}"/>
+              </a:ext>
+            </a:extLst>
+          </p:cNvPr>
+          <p:cNvPicPr>
+            <a:picLocks noChangeAspect="1"/>
+          </p:cNvPicPr>
+          <p:nvPr/>
+        </p:nvPicPr>
+        <p:blipFill>
+          <a:blip r:embed="rId3"/>
+          <a:stretch>
+            <a:fillRect/>
+          </a:stretch>
+        </p:blipFill>
+        <p:spPr>
+          <a:xfrm>
+            <a:off x="4223840" y="1837023"/>
+            <a:ext cx="3788229" cy="3788229"/>
+          </a:xfrm>
+          <a:prstGeom prst="rect">
+            <a:avLst/>
+          </a:prstGeom>
+        </p:spPr>
+      </p:pic>
+      <p:pic>
+        <p:nvPicPr>
+          <p:cNvPr id="6" name="Picture 5">
+            <a:extLst>
+              <a:ext uri="{FF2B5EF4-FFF2-40B4-BE49-F238E27FC236}">
+                <a16:creationId xmlns:a16="http://schemas.microsoft.com/office/drawing/2014/main" id="{616C320A-DA25-D40B-A233-516DB8983688}"/>
+              </a:ext>
+            </a:extLst>
+          </p:cNvPr>
+          <p:cNvPicPr>
+            <a:picLocks noChangeAspect="1"/>
+          </p:cNvPicPr>
+          <p:nvPr/>
+        </p:nvPicPr>
+        <p:blipFill>
+          <a:blip r:embed="rId4"/>
+          <a:stretch>
+            <a:fillRect/>
+          </a:stretch>
+        </p:blipFill>
+        <p:spPr>
+          <a:xfrm>
+            <a:off x="8244012" y="1883677"/>
+            <a:ext cx="3592286" cy="3694922"/>
+          </a:xfrm>
+          <a:prstGeom prst="rect">
+            <a:avLst/>
+          </a:prstGeom>
+        </p:spPr>
+      </p:pic>
+      <p:sp>
+        <p:nvSpPr>
+          <p:cNvPr id="5" name="TextBox 4">
+            <a:extLst>
+              <a:ext uri="{FF2B5EF4-FFF2-40B4-BE49-F238E27FC236}">
+                <a16:creationId xmlns:a16="http://schemas.microsoft.com/office/drawing/2014/main" id="{D66D0151-190D-C262-D537-7E953EEDF275}"/>
+              </a:ext>
+            </a:extLst>
+          </p:cNvPr>
+          <p:cNvSpPr txBox="1"/>
+          <p:nvPr/>
+        </p:nvSpPr>
+        <p:spPr>
+          <a:xfrm>
+            <a:off x="542077" y="1232747"/>
+            <a:ext cx="6362575" cy="400110"/>
+          </a:xfrm>
+          <a:prstGeom prst="rect">
+            <a:avLst/>
+          </a:prstGeom>
+          <a:noFill/>
+        </p:spPr>
+        <p:txBody>
+          <a:bodyPr wrap="square" rtlCol="0">
+            <a:spAutoFit/>
+          </a:bodyPr>
+          <a:lstStyle/>
+          <a:p>
+            <a:r>
+              <a:rPr lang="en-IN" sz="2000" dirty="0"/>
+              <a:t>Ridge Regression Model : 	   Predicted v/s Actual Results</a:t>
+            </a:r>
+          </a:p>
+        </p:txBody>
+      </p:sp>
     </p:spTree>
     <p:extLst>
       <p:ext uri="{BB962C8B-B14F-4D97-AF65-F5344CB8AC3E}">
         <p14:creationId xmlns:p14="http://schemas.microsoft.com/office/powerpoint/2010/main" val="2008676651"/>
+      </p:ext>
+    </p:extLst>
+  </p:cSld>
+  <p:clrMapOvr>
+    <a:masterClrMapping/>
+  </p:clrMapOvr>
+</p:sld>
+</file>
+
+<file path=ppt/slides/slide18.xml><?xml version="1.0" encoding="utf-8"?>
+<p:sld xmlns:a="http://schemas.openxmlformats.org/drawingml/2006/main" xmlns:r="http://schemas.openxmlformats.org/officeDocument/2006/relationships" xmlns:p="http://schemas.openxmlformats.org/presentationml/2006/main">
+  <p:cSld>
+    <p:spTree>
+      <p:nvGrpSpPr>
+        <p:cNvPr id="1" name="">
+          <a:extLst>
+            <a:ext uri="{FF2B5EF4-FFF2-40B4-BE49-F238E27FC236}">
+              <a16:creationId xmlns:a16="http://schemas.microsoft.com/office/drawing/2014/main" id="{A76E5B98-E186-F21B-C4F6-7B7743B321A6}"/>
+            </a:ext>
+          </a:extLst>
+        </p:cNvPr>
+        <p:cNvGrpSpPr/>
+        <p:nvPr/>
+      </p:nvGrpSpPr>
+      <p:grpSpPr>
+        <a:xfrm>
+          <a:off x="0" y="0"/>
+          <a:ext cx="0" cy="0"/>
+          <a:chOff x="0" y="0"/>
+          <a:chExt cx="0" cy="0"/>
+        </a:xfrm>
+      </p:grpSpPr>
+      <p:sp>
+        <p:nvSpPr>
+          <p:cNvPr id="2" name="Slide Number Placeholder 1">
+            <a:extLst>
+              <a:ext uri="{FF2B5EF4-FFF2-40B4-BE49-F238E27FC236}">
+                <a16:creationId xmlns:a16="http://schemas.microsoft.com/office/drawing/2014/main" id="{660D5B74-6D8B-22B5-BAA1-5A608DC1AF92}"/>
+              </a:ext>
+            </a:extLst>
+          </p:cNvPr>
+          <p:cNvSpPr>
+            <a:spLocks noGrp="1"/>
+          </p:cNvSpPr>
+          <p:nvPr>
+            <p:ph type="sldNum" sz="quarter" idx="12"/>
+          </p:nvPr>
+        </p:nvSpPr>
+        <p:spPr>
+          <a:xfrm>
+            <a:off x="11525877" y="6404419"/>
+            <a:ext cx="620843" cy="365125"/>
+          </a:xfrm>
+        </p:spPr>
+        <p:txBody>
+          <a:bodyPr/>
+          <a:lstStyle/>
+          <a:p>
+            <a:fld id="{8FBEC28E-4BEC-434E-A174-17C0E8C4B2B2}" type="slidenum">
+              <a:rPr lang="en-US" smtClean="0"/>
+              <a:pPr/>
+              <a:t>18</a:t>
+            </a:fld>
+            <a:endParaRPr lang="en-US" dirty="0"/>
+          </a:p>
+        </p:txBody>
+      </p:sp>
+      <p:sp>
+        <p:nvSpPr>
+          <p:cNvPr id="10" name="TextBox 9">
+            <a:extLst>
+              <a:ext uri="{FF2B5EF4-FFF2-40B4-BE49-F238E27FC236}">
+                <a16:creationId xmlns:a16="http://schemas.microsoft.com/office/drawing/2014/main" id="{CAB194F2-B6FC-6E0B-BB18-223B86B035AF}"/>
+              </a:ext>
+            </a:extLst>
+          </p:cNvPr>
+          <p:cNvSpPr txBox="1"/>
+          <p:nvPr/>
+        </p:nvSpPr>
+        <p:spPr>
+          <a:xfrm>
+            <a:off x="542078" y="84181"/>
+            <a:ext cx="5818771" cy="584775"/>
+          </a:xfrm>
+          <a:prstGeom prst="rect">
+            <a:avLst/>
+          </a:prstGeom>
+          <a:noFill/>
+        </p:spPr>
+        <p:txBody>
+          <a:bodyPr wrap="square" rtlCol="0">
+            <a:spAutoFit/>
+          </a:bodyPr>
+          <a:lstStyle/>
+          <a:p>
+            <a:r>
+              <a:rPr lang="en-US" sz="3200" b="1" dirty="0">
+                <a:solidFill>
+                  <a:srgbClr val="FF0000"/>
+                </a:solidFill>
+              </a:rPr>
+              <a:t>Plot Results</a:t>
+            </a:r>
+          </a:p>
+        </p:txBody>
+      </p:sp>
+      <p:pic>
+        <p:nvPicPr>
+          <p:cNvPr id="4" name="Picture 3">
+            <a:extLst>
+              <a:ext uri="{FF2B5EF4-FFF2-40B4-BE49-F238E27FC236}">
+                <a16:creationId xmlns:a16="http://schemas.microsoft.com/office/drawing/2014/main" id="{682768DE-506C-F980-1BF5-73A23B23EEF3}"/>
+              </a:ext>
+            </a:extLst>
+          </p:cNvPr>
+          <p:cNvPicPr>
+            <a:picLocks noChangeAspect="1"/>
+          </p:cNvPicPr>
+          <p:nvPr/>
+        </p:nvPicPr>
+        <p:blipFill>
+          <a:blip r:embed="rId2"/>
+          <a:stretch>
+            <a:fillRect/>
+          </a:stretch>
+        </p:blipFill>
+        <p:spPr>
+          <a:xfrm>
+            <a:off x="143581" y="1863400"/>
+            <a:ext cx="3650991" cy="3650991"/>
+          </a:xfrm>
+          <a:prstGeom prst="rect">
+            <a:avLst/>
+          </a:prstGeom>
+        </p:spPr>
+      </p:pic>
+      <p:pic>
+        <p:nvPicPr>
+          <p:cNvPr id="3" name="Picture 2">
+            <a:extLst>
+              <a:ext uri="{FF2B5EF4-FFF2-40B4-BE49-F238E27FC236}">
+                <a16:creationId xmlns:a16="http://schemas.microsoft.com/office/drawing/2014/main" id="{6EAF3CC2-791D-8F63-CE0A-4E3369A8AAA2}"/>
+              </a:ext>
+            </a:extLst>
+          </p:cNvPr>
+          <p:cNvPicPr>
+            <a:picLocks noChangeAspect="1"/>
+          </p:cNvPicPr>
+          <p:nvPr/>
+        </p:nvPicPr>
+        <p:blipFill>
+          <a:blip r:embed="rId3"/>
+          <a:stretch>
+            <a:fillRect/>
+          </a:stretch>
+        </p:blipFill>
+        <p:spPr>
+          <a:xfrm>
+            <a:off x="4164444" y="1863399"/>
+            <a:ext cx="3650991" cy="3650991"/>
+          </a:xfrm>
+          <a:prstGeom prst="rect">
+            <a:avLst/>
+          </a:prstGeom>
+        </p:spPr>
+      </p:pic>
+      <p:pic>
+        <p:nvPicPr>
+          <p:cNvPr id="5" name="Picture 4">
+            <a:extLst>
+              <a:ext uri="{FF2B5EF4-FFF2-40B4-BE49-F238E27FC236}">
+                <a16:creationId xmlns:a16="http://schemas.microsoft.com/office/drawing/2014/main" id="{A41B6F00-D280-C93C-9456-FB93F44F1673}"/>
+              </a:ext>
+            </a:extLst>
+          </p:cNvPr>
+          <p:cNvPicPr>
+            <a:picLocks noChangeAspect="1"/>
+          </p:cNvPicPr>
+          <p:nvPr/>
+        </p:nvPicPr>
+        <p:blipFill>
+          <a:blip r:embed="rId4"/>
+          <a:stretch>
+            <a:fillRect/>
+          </a:stretch>
+        </p:blipFill>
+        <p:spPr>
+          <a:xfrm>
+            <a:off x="8185307" y="1863399"/>
+            <a:ext cx="3650991" cy="3650991"/>
+          </a:xfrm>
+          <a:prstGeom prst="rect">
+            <a:avLst/>
+          </a:prstGeom>
+        </p:spPr>
+      </p:pic>
+      <p:sp>
+        <p:nvSpPr>
+          <p:cNvPr id="6" name="TextBox 5">
+            <a:extLst>
+              <a:ext uri="{FF2B5EF4-FFF2-40B4-BE49-F238E27FC236}">
+                <a16:creationId xmlns:a16="http://schemas.microsoft.com/office/drawing/2014/main" id="{573EE856-F33C-CD11-646C-70FE95578590}"/>
+              </a:ext>
+            </a:extLst>
+          </p:cNvPr>
+          <p:cNvSpPr txBox="1"/>
+          <p:nvPr/>
+        </p:nvSpPr>
+        <p:spPr>
+          <a:xfrm>
+            <a:off x="542078" y="1227529"/>
+            <a:ext cx="5653449" cy="400110"/>
+          </a:xfrm>
+          <a:prstGeom prst="rect">
+            <a:avLst/>
+          </a:prstGeom>
+          <a:noFill/>
+        </p:spPr>
+        <p:txBody>
+          <a:bodyPr wrap="square" rtlCol="0">
+            <a:spAutoFit/>
+          </a:bodyPr>
+          <a:lstStyle/>
+          <a:p>
+            <a:r>
+              <a:rPr lang="en-IN" sz="2000" dirty="0"/>
+              <a:t>Random Forest : 	   Predicted v/s Actual Results</a:t>
+            </a:r>
+          </a:p>
+        </p:txBody>
+      </p:sp>
+    </p:spTree>
+    <p:extLst>
+      <p:ext uri="{BB962C8B-B14F-4D97-AF65-F5344CB8AC3E}">
+        <p14:creationId xmlns:p14="http://schemas.microsoft.com/office/powerpoint/2010/main" val="3514939004"/>
+      </p:ext>
+    </p:extLst>
+  </p:cSld>
+  <p:clrMapOvr>
+    <a:masterClrMapping/>
+  </p:clrMapOvr>
+</p:sld>
+</file>
+
+<file path=ppt/slides/slide19.xml><?xml version="1.0" encoding="utf-8"?>
+<p:sld xmlns:a="http://schemas.openxmlformats.org/drawingml/2006/main" xmlns:r="http://schemas.openxmlformats.org/officeDocument/2006/relationships" xmlns:p="http://schemas.openxmlformats.org/presentationml/2006/main">
+  <p:cSld>
+    <p:spTree>
+      <p:nvGrpSpPr>
+        <p:cNvPr id="1" name="">
+          <a:extLst>
+            <a:ext uri="{FF2B5EF4-FFF2-40B4-BE49-F238E27FC236}">
+              <a16:creationId xmlns:a16="http://schemas.microsoft.com/office/drawing/2014/main" id="{694C0356-701C-EDD8-4B18-6540E4E9362D}"/>
+            </a:ext>
+          </a:extLst>
+        </p:cNvPr>
+        <p:cNvGrpSpPr/>
+        <p:nvPr/>
+      </p:nvGrpSpPr>
+      <p:grpSpPr>
+        <a:xfrm>
+          <a:off x="0" y="0"/>
+          <a:ext cx="0" cy="0"/>
+          <a:chOff x="0" y="0"/>
+          <a:chExt cx="0" cy="0"/>
+        </a:xfrm>
+      </p:grpSpPr>
+      <p:sp>
+        <p:nvSpPr>
+          <p:cNvPr id="2" name="Slide Number Placeholder 1">
+            <a:extLst>
+              <a:ext uri="{FF2B5EF4-FFF2-40B4-BE49-F238E27FC236}">
+                <a16:creationId xmlns:a16="http://schemas.microsoft.com/office/drawing/2014/main" id="{4081E3AC-A4D6-6544-81A4-752BC22D25EE}"/>
+              </a:ext>
+            </a:extLst>
+          </p:cNvPr>
+          <p:cNvSpPr>
+            <a:spLocks noGrp="1"/>
+          </p:cNvSpPr>
+          <p:nvPr>
+            <p:ph type="sldNum" sz="quarter" idx="12"/>
+          </p:nvPr>
+        </p:nvSpPr>
+        <p:spPr>
+          <a:xfrm>
+            <a:off x="11525877" y="6404419"/>
+            <a:ext cx="620843" cy="365125"/>
+          </a:xfrm>
+        </p:spPr>
+        <p:txBody>
+          <a:bodyPr/>
+          <a:lstStyle/>
+          <a:p>
+            <a:fld id="{8FBEC28E-4BEC-434E-A174-17C0E8C4B2B2}" type="slidenum">
+              <a:rPr lang="en-US" smtClean="0"/>
+              <a:pPr/>
+              <a:t>19</a:t>
+            </a:fld>
+            <a:endParaRPr lang="en-US" dirty="0"/>
+          </a:p>
+        </p:txBody>
+      </p:sp>
+      <p:sp>
+        <p:nvSpPr>
+          <p:cNvPr id="10" name="TextBox 9">
+            <a:extLst>
+              <a:ext uri="{FF2B5EF4-FFF2-40B4-BE49-F238E27FC236}">
+                <a16:creationId xmlns:a16="http://schemas.microsoft.com/office/drawing/2014/main" id="{FF22953D-E0CB-19E5-E0A3-45A615B35888}"/>
+              </a:ext>
+            </a:extLst>
+          </p:cNvPr>
+          <p:cNvSpPr txBox="1"/>
+          <p:nvPr/>
+        </p:nvSpPr>
+        <p:spPr>
+          <a:xfrm>
+            <a:off x="542078" y="84181"/>
+            <a:ext cx="5818771" cy="584775"/>
+          </a:xfrm>
+          <a:prstGeom prst="rect">
+            <a:avLst/>
+          </a:prstGeom>
+          <a:noFill/>
+        </p:spPr>
+        <p:txBody>
+          <a:bodyPr wrap="square" rtlCol="0">
+            <a:spAutoFit/>
+          </a:bodyPr>
+          <a:lstStyle/>
+          <a:p>
+            <a:r>
+              <a:rPr lang="en-US" sz="3200" b="1" dirty="0">
+                <a:solidFill>
+                  <a:srgbClr val="FF0000"/>
+                </a:solidFill>
+              </a:rPr>
+              <a:t>Plot Results</a:t>
+            </a:r>
+          </a:p>
+        </p:txBody>
+      </p:sp>
+      <p:pic>
+        <p:nvPicPr>
+          <p:cNvPr id="4" name="Picture 3">
+            <a:extLst>
+              <a:ext uri="{FF2B5EF4-FFF2-40B4-BE49-F238E27FC236}">
+                <a16:creationId xmlns:a16="http://schemas.microsoft.com/office/drawing/2014/main" id="{A4FC5BFE-73CA-4AF4-92DF-35DE34A9A689}"/>
+              </a:ext>
+            </a:extLst>
+          </p:cNvPr>
+          <p:cNvPicPr>
+            <a:picLocks noChangeAspect="1"/>
+          </p:cNvPicPr>
+          <p:nvPr/>
+        </p:nvPicPr>
+        <p:blipFill>
+          <a:blip r:embed="rId2"/>
+          <a:stretch>
+            <a:fillRect/>
+          </a:stretch>
+        </p:blipFill>
+        <p:spPr>
+          <a:xfrm>
+            <a:off x="91155" y="1763620"/>
+            <a:ext cx="3853408" cy="3853408"/>
+          </a:xfrm>
+          <a:prstGeom prst="rect">
+            <a:avLst/>
+          </a:prstGeom>
+        </p:spPr>
+      </p:pic>
+      <p:pic>
+        <p:nvPicPr>
+          <p:cNvPr id="3" name="Picture 2">
+            <a:extLst>
+              <a:ext uri="{FF2B5EF4-FFF2-40B4-BE49-F238E27FC236}">
+                <a16:creationId xmlns:a16="http://schemas.microsoft.com/office/drawing/2014/main" id="{0D17E693-6C98-015C-EC6B-E3EC5ED90970}"/>
+              </a:ext>
+            </a:extLst>
+          </p:cNvPr>
+          <p:cNvPicPr>
+            <a:picLocks noChangeAspect="1"/>
+          </p:cNvPicPr>
+          <p:nvPr/>
+        </p:nvPicPr>
+        <p:blipFill>
+          <a:blip r:embed="rId3"/>
+          <a:stretch>
+            <a:fillRect/>
+          </a:stretch>
+        </p:blipFill>
+        <p:spPr>
+          <a:xfrm>
+            <a:off x="4095926" y="1763620"/>
+            <a:ext cx="3853408" cy="3853408"/>
+          </a:xfrm>
+          <a:prstGeom prst="rect">
+            <a:avLst/>
+          </a:prstGeom>
+        </p:spPr>
+      </p:pic>
+      <p:pic>
+        <p:nvPicPr>
+          <p:cNvPr id="5" name="Picture 4">
+            <a:extLst>
+              <a:ext uri="{FF2B5EF4-FFF2-40B4-BE49-F238E27FC236}">
+                <a16:creationId xmlns:a16="http://schemas.microsoft.com/office/drawing/2014/main" id="{70E0DFA1-0815-1744-038E-D2E4C1C07968}"/>
+              </a:ext>
+            </a:extLst>
+          </p:cNvPr>
+          <p:cNvPicPr>
+            <a:picLocks noChangeAspect="1"/>
+          </p:cNvPicPr>
+          <p:nvPr/>
+        </p:nvPicPr>
+        <p:blipFill>
+          <a:blip r:embed="rId4"/>
+          <a:stretch>
+            <a:fillRect/>
+          </a:stretch>
+        </p:blipFill>
+        <p:spPr>
+          <a:xfrm>
+            <a:off x="8100697" y="1763619"/>
+            <a:ext cx="3853409" cy="3853409"/>
+          </a:xfrm>
+          <a:prstGeom prst="rect">
+            <a:avLst/>
+          </a:prstGeom>
+        </p:spPr>
+      </p:pic>
+      <p:sp>
+        <p:nvSpPr>
+          <p:cNvPr id="6" name="TextBox 5">
+            <a:extLst>
+              <a:ext uri="{FF2B5EF4-FFF2-40B4-BE49-F238E27FC236}">
+                <a16:creationId xmlns:a16="http://schemas.microsoft.com/office/drawing/2014/main" id="{DA51FCC2-4411-33FE-FEF7-3CBD4BD82BBB}"/>
+              </a:ext>
+            </a:extLst>
+          </p:cNvPr>
+          <p:cNvSpPr txBox="1"/>
+          <p:nvPr/>
+        </p:nvSpPr>
+        <p:spPr>
+          <a:xfrm>
+            <a:off x="542077" y="1268963"/>
+            <a:ext cx="6110649" cy="400110"/>
+          </a:xfrm>
+          <a:prstGeom prst="rect">
+            <a:avLst/>
+          </a:prstGeom>
+          <a:noFill/>
+        </p:spPr>
+        <p:txBody>
+          <a:bodyPr wrap="square" rtlCol="0">
+            <a:spAutoFit/>
+          </a:bodyPr>
+          <a:lstStyle/>
+          <a:p>
+            <a:r>
+              <a:rPr lang="en-IN" sz="2000" dirty="0"/>
+              <a:t>Neural Networks :    Predicted v/s Actual Results</a:t>
+            </a:r>
+          </a:p>
+        </p:txBody>
+      </p:sp>
+    </p:spTree>
+    <p:extLst>
+      <p:ext uri="{BB962C8B-B14F-4D97-AF65-F5344CB8AC3E}">
+        <p14:creationId xmlns:p14="http://schemas.microsoft.com/office/powerpoint/2010/main" val="1960264867"/>
       </p:ext>
     </p:extLst>
   </p:cSld>
@@ -9853,7 +10145,7 @@
         <p:spPr>
           <a:xfrm>
             <a:off x="1156996" y="1259210"/>
-            <a:ext cx="8976049" cy="4401205"/>
+            <a:ext cx="8976049" cy="4093428"/>
           </a:xfrm>
           <a:prstGeom prst="rect">
             <a:avLst/>
@@ -9867,8 +10159,8 @@
           <a:lstStyle/>
           <a:p>
             <a:pPr marL="342900" indent="-342900">
-              <a:buFont typeface="Arial" panose="020B0604020202020204" pitchFamily="34" charset="0"/>
-              <a:buChar char="•"/>
+              <a:buFont typeface="Wingdings" panose="05000000000000000000" pitchFamily="2" charset="2"/>
+              <a:buChar char="Ø"/>
             </a:pPr>
             <a:r>
               <a:rPr lang="en-US" sz="2000" b="1" dirty="0"/>
@@ -9881,15 +10173,15 @@
           </a:p>
           <a:p>
             <a:pPr marL="342900" indent="-342900">
-              <a:buFont typeface="Arial" panose="020B0604020202020204" pitchFamily="34" charset="0"/>
-              <a:buChar char="•"/>
+              <a:buFont typeface="Wingdings" panose="05000000000000000000" pitchFamily="2" charset="2"/>
+              <a:buChar char="Ø"/>
             </a:pPr>
             <a:endParaRPr lang="en-US" sz="2000" dirty="0"/>
           </a:p>
           <a:p>
             <a:pPr marL="342900" indent="-342900">
-              <a:buFont typeface="Arial" panose="020B0604020202020204" pitchFamily="34" charset="0"/>
-              <a:buChar char="•"/>
+              <a:buFont typeface="Wingdings" panose="05000000000000000000" pitchFamily="2" charset="2"/>
+              <a:buChar char="Ø"/>
             </a:pPr>
             <a:r>
               <a:rPr lang="en-US" sz="2000" b="1" dirty="0"/>
@@ -9897,20 +10189,20 @@
             </a:r>
             <a:r>
               <a:rPr lang="en-US" sz="2000" dirty="0"/>
-              <a:t>Exploring a wide range of alloy compositions is impractical using traditional, serial MD runs — making large-scale screening very slow.</a:t>
+              <a:t>Exploring a wide range of alloy compositions is impractical using traditional serial MD runs.</a:t>
             </a:r>
           </a:p>
           <a:p>
             <a:pPr marL="342900" indent="-342900">
-              <a:buFont typeface="Arial" panose="020B0604020202020204" pitchFamily="34" charset="0"/>
-              <a:buChar char="•"/>
+              <a:buFont typeface="Wingdings" panose="05000000000000000000" pitchFamily="2" charset="2"/>
+              <a:buChar char="Ø"/>
             </a:pPr>
             <a:endParaRPr lang="en-US" sz="2000" dirty="0"/>
           </a:p>
           <a:p>
             <a:pPr marL="342900" indent="-342900">
-              <a:buFont typeface="Arial" panose="020B0604020202020204" pitchFamily="34" charset="0"/>
-              <a:buChar char="•"/>
+              <a:buFont typeface="Wingdings" panose="05000000000000000000" pitchFamily="2" charset="2"/>
+              <a:buChar char="Ø"/>
             </a:pPr>
             <a:r>
               <a:rPr lang="en-US" sz="2000" b="1" dirty="0"/>
@@ -9918,20 +10210,20 @@
             </a:r>
             <a:r>
               <a:rPr lang="en-US" sz="2000" dirty="0"/>
-              <a:t> MD provides complex atomic data, but the goal is the macro-scale mechanical properties, which require heavy post-processing to obtain.</a:t>
+              <a:t> While MD generates detailed atomic-level data, extracting macro-scale properties (UTS, E, Yield Strength) requires heavy post-processing.</a:t>
             </a:r>
           </a:p>
           <a:p>
             <a:pPr marL="342900" indent="-342900">
-              <a:buFont typeface="Arial" panose="020B0604020202020204" pitchFamily="34" charset="0"/>
-              <a:buChar char="•"/>
+              <a:buFont typeface="Wingdings" panose="05000000000000000000" pitchFamily="2" charset="2"/>
+              <a:buChar char="Ø"/>
             </a:pPr>
             <a:endParaRPr lang="en-US" sz="2000" dirty="0"/>
           </a:p>
           <a:p>
             <a:pPr marL="342900" indent="-342900">
-              <a:buFont typeface="Arial" panose="020B0604020202020204" pitchFamily="34" charset="0"/>
-              <a:buChar char="•"/>
+              <a:buFont typeface="Wingdings" panose="05000000000000000000" pitchFamily="2" charset="2"/>
+              <a:buChar char="Ø"/>
             </a:pPr>
             <a:r>
               <a:rPr lang="en-US" sz="2000" b="1" dirty="0"/>
@@ -10075,7 +10367,7 @@
         <p:cNvPr id="1" name="">
           <a:extLst>
             <a:ext uri="{FF2B5EF4-FFF2-40B4-BE49-F238E27FC236}">
-              <a16:creationId xmlns:a16="http://schemas.microsoft.com/office/drawing/2014/main" id="{12EF56FD-4BB2-BBB9-CE6F-5706F57ED9A3}"/>
+              <a16:creationId xmlns:a16="http://schemas.microsoft.com/office/drawing/2014/main" id="{8CF3A853-116B-4E61-F9F5-2309E4C84CD7}"/>
             </a:ext>
           </a:extLst>
         </p:cNvPr>
@@ -10095,7 +10387,7 @@
           <p:cNvPr id="2" name="Slide Number Placeholder 1">
             <a:extLst>
               <a:ext uri="{FF2B5EF4-FFF2-40B4-BE49-F238E27FC236}">
-                <a16:creationId xmlns:a16="http://schemas.microsoft.com/office/drawing/2014/main" id="{19B19113-7EBD-FD8E-EF72-671DDC3080DC}"/>
+                <a16:creationId xmlns:a16="http://schemas.microsoft.com/office/drawing/2014/main" id="{A3CB7FF6-1A36-8706-B50C-CED1A90E78E5}"/>
               </a:ext>
             </a:extLst>
           </p:cNvPr>
@@ -10130,7 +10422,7 @@
           <p:cNvPr id="10" name="TextBox 9">
             <a:extLst>
               <a:ext uri="{FF2B5EF4-FFF2-40B4-BE49-F238E27FC236}">
-                <a16:creationId xmlns:a16="http://schemas.microsoft.com/office/drawing/2014/main" id="{3143447F-54D7-89CA-98C9-70076B856AED}"/>
+                <a16:creationId xmlns:a16="http://schemas.microsoft.com/office/drawing/2014/main" id="{5E03E601-05B3-0BC7-F763-0383DDC54AC6}"/>
               </a:ext>
             </a:extLst>
           </p:cNvPr>
@@ -10159,1127 +10451,7 @@
                   <a:srgbClr val="FF0000"/>
                 </a:solidFill>
               </a:rPr>
-              <a:t>Plot Results</a:t>
-            </a:r>
-          </a:p>
-        </p:txBody>
-      </p:sp>
-      <p:pic>
-        <p:nvPicPr>
-          <p:cNvPr id="4" name="Picture 3">
-            <a:extLst>
-              <a:ext uri="{FF2B5EF4-FFF2-40B4-BE49-F238E27FC236}">
-                <a16:creationId xmlns:a16="http://schemas.microsoft.com/office/drawing/2014/main" id="{8466C4C7-AB67-51C3-BF8D-54B1EEDF766C}"/>
-              </a:ext>
-            </a:extLst>
-          </p:cNvPr>
-          <p:cNvPicPr>
-            <a:picLocks noChangeAspect="1"/>
-          </p:cNvPicPr>
-          <p:nvPr/>
-        </p:nvPicPr>
-        <p:blipFill>
-          <a:blip r:embed="rId2"/>
-          <a:stretch>
-            <a:fillRect/>
-          </a:stretch>
-        </p:blipFill>
-        <p:spPr>
-          <a:xfrm>
-            <a:off x="3362774" y="801410"/>
-            <a:ext cx="5466452" cy="5466452"/>
-          </a:xfrm>
-          <a:prstGeom prst="rect">
-            <a:avLst/>
-          </a:prstGeom>
-        </p:spPr>
-      </p:pic>
-    </p:spTree>
-    <p:extLst>
-      <p:ext uri="{BB962C8B-B14F-4D97-AF65-F5344CB8AC3E}">
-        <p14:creationId xmlns:p14="http://schemas.microsoft.com/office/powerpoint/2010/main" val="3355362789"/>
-      </p:ext>
-    </p:extLst>
-  </p:cSld>
-  <p:clrMapOvr>
-    <a:masterClrMapping/>
-  </p:clrMapOvr>
-</p:sld>
-</file>
-
-<file path=ppt/slides/slide21.xml><?xml version="1.0" encoding="utf-8"?>
-<p:sld xmlns:a="http://schemas.openxmlformats.org/drawingml/2006/main" xmlns:r="http://schemas.openxmlformats.org/officeDocument/2006/relationships" xmlns:p="http://schemas.openxmlformats.org/presentationml/2006/main">
-  <p:cSld>
-    <p:spTree>
-      <p:nvGrpSpPr>
-        <p:cNvPr id="1" name="">
-          <a:extLst>
-            <a:ext uri="{FF2B5EF4-FFF2-40B4-BE49-F238E27FC236}">
-              <a16:creationId xmlns:a16="http://schemas.microsoft.com/office/drawing/2014/main" id="{103DF4B7-83B4-62B1-0104-C5F7213406B4}"/>
-            </a:ext>
-          </a:extLst>
-        </p:cNvPr>
-        <p:cNvGrpSpPr/>
-        <p:nvPr/>
-      </p:nvGrpSpPr>
-      <p:grpSpPr>
-        <a:xfrm>
-          <a:off x="0" y="0"/>
-          <a:ext cx="0" cy="0"/>
-          <a:chOff x="0" y="0"/>
-          <a:chExt cx="0" cy="0"/>
-        </a:xfrm>
-      </p:grpSpPr>
-      <p:sp>
-        <p:nvSpPr>
-          <p:cNvPr id="2" name="Slide Number Placeholder 1">
-            <a:extLst>
-              <a:ext uri="{FF2B5EF4-FFF2-40B4-BE49-F238E27FC236}">
-                <a16:creationId xmlns:a16="http://schemas.microsoft.com/office/drawing/2014/main" id="{C36DBCD9-8976-5E8F-3A6B-8330C195265B}"/>
-              </a:ext>
-            </a:extLst>
-          </p:cNvPr>
-          <p:cNvSpPr>
-            <a:spLocks noGrp="1"/>
-          </p:cNvSpPr>
-          <p:nvPr>
-            <p:ph type="sldNum" sz="quarter" idx="12"/>
-          </p:nvPr>
-        </p:nvSpPr>
-        <p:spPr>
-          <a:xfrm>
-            <a:off x="11525877" y="6404419"/>
-            <a:ext cx="620843" cy="365125"/>
-          </a:xfrm>
-        </p:spPr>
-        <p:txBody>
-          <a:bodyPr/>
-          <a:lstStyle/>
-          <a:p>
-            <a:fld id="{8FBEC28E-4BEC-434E-A174-17C0E8C4B2B2}" type="slidenum">
-              <a:rPr lang="en-US" smtClean="0"/>
-              <a:pPr/>
-              <a:t>21</a:t>
-            </a:fld>
-            <a:endParaRPr lang="en-US" dirty="0"/>
-          </a:p>
-        </p:txBody>
-      </p:sp>
-      <p:sp>
-        <p:nvSpPr>
-          <p:cNvPr id="10" name="TextBox 9">
-            <a:extLst>
-              <a:ext uri="{FF2B5EF4-FFF2-40B4-BE49-F238E27FC236}">
-                <a16:creationId xmlns:a16="http://schemas.microsoft.com/office/drawing/2014/main" id="{38DDF955-FC1B-4410-A9DA-5BB33A3CC174}"/>
-              </a:ext>
-            </a:extLst>
-          </p:cNvPr>
-          <p:cNvSpPr txBox="1"/>
-          <p:nvPr/>
-        </p:nvSpPr>
-        <p:spPr>
-          <a:xfrm>
-            <a:off x="542078" y="84181"/>
-            <a:ext cx="5818771" cy="584775"/>
-          </a:xfrm>
-          <a:prstGeom prst="rect">
-            <a:avLst/>
-          </a:prstGeom>
-          <a:noFill/>
-        </p:spPr>
-        <p:txBody>
-          <a:bodyPr wrap="square" rtlCol="0">
-            <a:spAutoFit/>
-          </a:bodyPr>
-          <a:lstStyle/>
-          <a:p>
-            <a:r>
-              <a:rPr lang="en-US" sz="3200" b="1" dirty="0">
-                <a:solidFill>
-                  <a:srgbClr val="FF0000"/>
-                </a:solidFill>
-              </a:rPr>
-              <a:t>Plot Results</a:t>
-            </a:r>
-          </a:p>
-        </p:txBody>
-      </p:sp>
-      <p:pic>
-        <p:nvPicPr>
-          <p:cNvPr id="6" name="Picture 5">
-            <a:extLst>
-              <a:ext uri="{FF2B5EF4-FFF2-40B4-BE49-F238E27FC236}">
-                <a16:creationId xmlns:a16="http://schemas.microsoft.com/office/drawing/2014/main" id="{616C320A-DA25-D40B-A233-516DB8983688}"/>
-              </a:ext>
-            </a:extLst>
-          </p:cNvPr>
-          <p:cNvPicPr>
-            <a:picLocks noChangeAspect="1"/>
-          </p:cNvPicPr>
-          <p:nvPr/>
-        </p:nvPicPr>
-        <p:blipFill>
-          <a:blip r:embed="rId2"/>
-          <a:stretch>
-            <a:fillRect/>
-          </a:stretch>
-        </p:blipFill>
-        <p:spPr>
-          <a:xfrm>
-            <a:off x="3396343" y="794745"/>
-            <a:ext cx="5504494" cy="5504494"/>
-          </a:xfrm>
-          <a:prstGeom prst="rect">
-            <a:avLst/>
-          </a:prstGeom>
-        </p:spPr>
-      </p:pic>
-    </p:spTree>
-    <p:extLst>
-      <p:ext uri="{BB962C8B-B14F-4D97-AF65-F5344CB8AC3E}">
-        <p14:creationId xmlns:p14="http://schemas.microsoft.com/office/powerpoint/2010/main" val="2912765676"/>
-      </p:ext>
-    </p:extLst>
-  </p:cSld>
-  <p:clrMapOvr>
-    <a:masterClrMapping/>
-  </p:clrMapOvr>
-</p:sld>
-</file>
-
-<file path=ppt/slides/slide22.xml><?xml version="1.0" encoding="utf-8"?>
-<p:sld xmlns:a="http://schemas.openxmlformats.org/drawingml/2006/main" xmlns:r="http://schemas.openxmlformats.org/officeDocument/2006/relationships" xmlns:p="http://schemas.openxmlformats.org/presentationml/2006/main">
-  <p:cSld>
-    <p:spTree>
-      <p:nvGrpSpPr>
-        <p:cNvPr id="1" name="">
-          <a:extLst>
-            <a:ext uri="{FF2B5EF4-FFF2-40B4-BE49-F238E27FC236}">
-              <a16:creationId xmlns:a16="http://schemas.microsoft.com/office/drawing/2014/main" id="{A76E5B98-E186-F21B-C4F6-7B7743B321A6}"/>
-            </a:ext>
-          </a:extLst>
-        </p:cNvPr>
-        <p:cNvGrpSpPr/>
-        <p:nvPr/>
-      </p:nvGrpSpPr>
-      <p:grpSpPr>
-        <a:xfrm>
-          <a:off x="0" y="0"/>
-          <a:ext cx="0" cy="0"/>
-          <a:chOff x="0" y="0"/>
-          <a:chExt cx="0" cy="0"/>
-        </a:xfrm>
-      </p:grpSpPr>
-      <p:sp>
-        <p:nvSpPr>
-          <p:cNvPr id="2" name="Slide Number Placeholder 1">
-            <a:extLst>
-              <a:ext uri="{FF2B5EF4-FFF2-40B4-BE49-F238E27FC236}">
-                <a16:creationId xmlns:a16="http://schemas.microsoft.com/office/drawing/2014/main" id="{660D5B74-6D8B-22B5-BAA1-5A608DC1AF92}"/>
-              </a:ext>
-            </a:extLst>
-          </p:cNvPr>
-          <p:cNvSpPr>
-            <a:spLocks noGrp="1"/>
-          </p:cNvSpPr>
-          <p:nvPr>
-            <p:ph type="sldNum" sz="quarter" idx="12"/>
-          </p:nvPr>
-        </p:nvSpPr>
-        <p:spPr>
-          <a:xfrm>
-            <a:off x="11525877" y="6404419"/>
-            <a:ext cx="620843" cy="365125"/>
-          </a:xfrm>
-        </p:spPr>
-        <p:txBody>
-          <a:bodyPr/>
-          <a:lstStyle/>
-          <a:p>
-            <a:fld id="{8FBEC28E-4BEC-434E-A174-17C0E8C4B2B2}" type="slidenum">
-              <a:rPr lang="en-US" smtClean="0"/>
-              <a:pPr/>
-              <a:t>22</a:t>
-            </a:fld>
-            <a:endParaRPr lang="en-US" dirty="0"/>
-          </a:p>
-        </p:txBody>
-      </p:sp>
-      <p:sp>
-        <p:nvSpPr>
-          <p:cNvPr id="10" name="TextBox 9">
-            <a:extLst>
-              <a:ext uri="{FF2B5EF4-FFF2-40B4-BE49-F238E27FC236}">
-                <a16:creationId xmlns:a16="http://schemas.microsoft.com/office/drawing/2014/main" id="{CAB194F2-B6FC-6E0B-BB18-223B86B035AF}"/>
-              </a:ext>
-            </a:extLst>
-          </p:cNvPr>
-          <p:cNvSpPr txBox="1"/>
-          <p:nvPr/>
-        </p:nvSpPr>
-        <p:spPr>
-          <a:xfrm>
-            <a:off x="542078" y="84181"/>
-            <a:ext cx="5818771" cy="584775"/>
-          </a:xfrm>
-          <a:prstGeom prst="rect">
-            <a:avLst/>
-          </a:prstGeom>
-          <a:noFill/>
-        </p:spPr>
-        <p:txBody>
-          <a:bodyPr wrap="square" rtlCol="0">
-            <a:spAutoFit/>
-          </a:bodyPr>
-          <a:lstStyle/>
-          <a:p>
-            <a:r>
-              <a:rPr lang="en-US" sz="3200" b="1" dirty="0">
-                <a:solidFill>
-                  <a:srgbClr val="FF0000"/>
-                </a:solidFill>
-              </a:rPr>
-              <a:t>Plot Results</a:t>
-            </a:r>
-          </a:p>
-        </p:txBody>
-      </p:sp>
-      <p:pic>
-        <p:nvPicPr>
-          <p:cNvPr id="4" name="Picture 3">
-            <a:extLst>
-              <a:ext uri="{FF2B5EF4-FFF2-40B4-BE49-F238E27FC236}">
-                <a16:creationId xmlns:a16="http://schemas.microsoft.com/office/drawing/2014/main" id="{682768DE-506C-F980-1BF5-73A23B23EEF3}"/>
-              </a:ext>
-            </a:extLst>
-          </p:cNvPr>
-          <p:cNvPicPr>
-            <a:picLocks noChangeAspect="1"/>
-          </p:cNvPicPr>
-          <p:nvPr/>
-        </p:nvPicPr>
-        <p:blipFill>
-          <a:blip r:embed="rId2"/>
-          <a:stretch>
-            <a:fillRect/>
-          </a:stretch>
-        </p:blipFill>
-        <p:spPr>
-          <a:xfrm>
-            <a:off x="3322475" y="751115"/>
-            <a:ext cx="5547050" cy="5547050"/>
-          </a:xfrm>
-          <a:prstGeom prst="rect">
-            <a:avLst/>
-          </a:prstGeom>
-        </p:spPr>
-      </p:pic>
-    </p:spTree>
-    <p:extLst>
-      <p:ext uri="{BB962C8B-B14F-4D97-AF65-F5344CB8AC3E}">
-        <p14:creationId xmlns:p14="http://schemas.microsoft.com/office/powerpoint/2010/main" val="3514939004"/>
-      </p:ext>
-    </p:extLst>
-  </p:cSld>
-  <p:clrMapOvr>
-    <a:masterClrMapping/>
-  </p:clrMapOvr>
-</p:sld>
-</file>
-
-<file path=ppt/slides/slide23.xml><?xml version="1.0" encoding="utf-8"?>
-<p:sld xmlns:a="http://schemas.openxmlformats.org/drawingml/2006/main" xmlns:r="http://schemas.openxmlformats.org/officeDocument/2006/relationships" xmlns:p="http://schemas.openxmlformats.org/presentationml/2006/main">
-  <p:cSld>
-    <p:spTree>
-      <p:nvGrpSpPr>
-        <p:cNvPr id="1" name="">
-          <a:extLst>
-            <a:ext uri="{FF2B5EF4-FFF2-40B4-BE49-F238E27FC236}">
-              <a16:creationId xmlns:a16="http://schemas.microsoft.com/office/drawing/2014/main" id="{C7225506-6B09-5157-BD9B-61519F5CB26E}"/>
-            </a:ext>
-          </a:extLst>
-        </p:cNvPr>
-        <p:cNvGrpSpPr/>
-        <p:nvPr/>
-      </p:nvGrpSpPr>
-      <p:grpSpPr>
-        <a:xfrm>
-          <a:off x="0" y="0"/>
-          <a:ext cx="0" cy="0"/>
-          <a:chOff x="0" y="0"/>
-          <a:chExt cx="0" cy="0"/>
-        </a:xfrm>
-      </p:grpSpPr>
-      <p:sp>
-        <p:nvSpPr>
-          <p:cNvPr id="2" name="Slide Number Placeholder 1">
-            <a:extLst>
-              <a:ext uri="{FF2B5EF4-FFF2-40B4-BE49-F238E27FC236}">
-                <a16:creationId xmlns:a16="http://schemas.microsoft.com/office/drawing/2014/main" id="{C4E8608B-D47C-864D-0705-0E3F2BF64FAC}"/>
-              </a:ext>
-            </a:extLst>
-          </p:cNvPr>
-          <p:cNvSpPr>
-            <a:spLocks noGrp="1"/>
-          </p:cNvSpPr>
-          <p:nvPr>
-            <p:ph type="sldNum" sz="quarter" idx="12"/>
-          </p:nvPr>
-        </p:nvSpPr>
-        <p:spPr>
-          <a:xfrm>
-            <a:off x="11525877" y="6404419"/>
-            <a:ext cx="620843" cy="365125"/>
-          </a:xfrm>
-        </p:spPr>
-        <p:txBody>
-          <a:bodyPr/>
-          <a:lstStyle/>
-          <a:p>
-            <a:fld id="{8FBEC28E-4BEC-434E-A174-17C0E8C4B2B2}" type="slidenum">
-              <a:rPr lang="en-US" smtClean="0"/>
-              <a:pPr/>
-              <a:t>23</a:t>
-            </a:fld>
-            <a:endParaRPr lang="en-US" dirty="0"/>
-          </a:p>
-        </p:txBody>
-      </p:sp>
-      <p:sp>
-        <p:nvSpPr>
-          <p:cNvPr id="10" name="TextBox 9">
-            <a:extLst>
-              <a:ext uri="{FF2B5EF4-FFF2-40B4-BE49-F238E27FC236}">
-                <a16:creationId xmlns:a16="http://schemas.microsoft.com/office/drawing/2014/main" id="{BAF62713-16F6-94E6-13FE-52397E00C8B6}"/>
-              </a:ext>
-            </a:extLst>
-          </p:cNvPr>
-          <p:cNvSpPr txBox="1"/>
-          <p:nvPr/>
-        </p:nvSpPr>
-        <p:spPr>
-          <a:xfrm>
-            <a:off x="542078" y="84181"/>
-            <a:ext cx="5818771" cy="584775"/>
-          </a:xfrm>
-          <a:prstGeom prst="rect">
-            <a:avLst/>
-          </a:prstGeom>
-          <a:noFill/>
-        </p:spPr>
-        <p:txBody>
-          <a:bodyPr wrap="square" rtlCol="0">
-            <a:spAutoFit/>
-          </a:bodyPr>
-          <a:lstStyle/>
-          <a:p>
-            <a:r>
-              <a:rPr lang="en-US" sz="3200" b="1" dirty="0">
-                <a:solidFill>
-                  <a:srgbClr val="FF0000"/>
-                </a:solidFill>
-              </a:rPr>
-              <a:t>Plot Results</a:t>
-            </a:r>
-          </a:p>
-        </p:txBody>
-      </p:sp>
-      <p:pic>
-        <p:nvPicPr>
-          <p:cNvPr id="4" name="Picture 3">
-            <a:extLst>
-              <a:ext uri="{FF2B5EF4-FFF2-40B4-BE49-F238E27FC236}">
-                <a16:creationId xmlns:a16="http://schemas.microsoft.com/office/drawing/2014/main" id="{6EAF3CC2-791D-8F63-CE0A-4E3369A8AAA2}"/>
-              </a:ext>
-            </a:extLst>
-          </p:cNvPr>
-          <p:cNvPicPr>
-            <a:picLocks noChangeAspect="1"/>
-          </p:cNvPicPr>
-          <p:nvPr/>
-        </p:nvPicPr>
-        <p:blipFill>
-          <a:blip r:embed="rId2"/>
-          <a:stretch>
-            <a:fillRect/>
-          </a:stretch>
-        </p:blipFill>
-        <p:spPr>
-          <a:xfrm>
-            <a:off x="3371461" y="811763"/>
-            <a:ext cx="5449078" cy="5449078"/>
-          </a:xfrm>
-          <a:prstGeom prst="rect">
-            <a:avLst/>
-          </a:prstGeom>
-        </p:spPr>
-      </p:pic>
-    </p:spTree>
-    <p:extLst>
-      <p:ext uri="{BB962C8B-B14F-4D97-AF65-F5344CB8AC3E}">
-        <p14:creationId xmlns:p14="http://schemas.microsoft.com/office/powerpoint/2010/main" val="500015260"/>
-      </p:ext>
-    </p:extLst>
-  </p:cSld>
-  <p:clrMapOvr>
-    <a:masterClrMapping/>
-  </p:clrMapOvr>
-</p:sld>
-</file>
-
-<file path=ppt/slides/slide24.xml><?xml version="1.0" encoding="utf-8"?>
-<p:sld xmlns:a="http://schemas.openxmlformats.org/drawingml/2006/main" xmlns:r="http://schemas.openxmlformats.org/officeDocument/2006/relationships" xmlns:p="http://schemas.openxmlformats.org/presentationml/2006/main">
-  <p:cSld>
-    <p:spTree>
-      <p:nvGrpSpPr>
-        <p:cNvPr id="1" name="">
-          <a:extLst>
-            <a:ext uri="{FF2B5EF4-FFF2-40B4-BE49-F238E27FC236}">
-              <a16:creationId xmlns:a16="http://schemas.microsoft.com/office/drawing/2014/main" id="{9124BF29-CE66-115D-4ECD-A647960276F0}"/>
-            </a:ext>
-          </a:extLst>
-        </p:cNvPr>
-        <p:cNvGrpSpPr/>
-        <p:nvPr/>
-      </p:nvGrpSpPr>
-      <p:grpSpPr>
-        <a:xfrm>
-          <a:off x="0" y="0"/>
-          <a:ext cx="0" cy="0"/>
-          <a:chOff x="0" y="0"/>
-          <a:chExt cx="0" cy="0"/>
-        </a:xfrm>
-      </p:grpSpPr>
-      <p:sp>
-        <p:nvSpPr>
-          <p:cNvPr id="2" name="Slide Number Placeholder 1">
-            <a:extLst>
-              <a:ext uri="{FF2B5EF4-FFF2-40B4-BE49-F238E27FC236}">
-                <a16:creationId xmlns:a16="http://schemas.microsoft.com/office/drawing/2014/main" id="{95199E52-8F53-FC6A-A6C7-63F1EAEED2B8}"/>
-              </a:ext>
-            </a:extLst>
-          </p:cNvPr>
-          <p:cNvSpPr>
-            <a:spLocks noGrp="1"/>
-          </p:cNvSpPr>
-          <p:nvPr>
-            <p:ph type="sldNum" sz="quarter" idx="12"/>
-          </p:nvPr>
-        </p:nvSpPr>
-        <p:spPr>
-          <a:xfrm>
-            <a:off x="11525877" y="6404419"/>
-            <a:ext cx="620843" cy="365125"/>
-          </a:xfrm>
-        </p:spPr>
-        <p:txBody>
-          <a:bodyPr/>
-          <a:lstStyle/>
-          <a:p>
-            <a:fld id="{8FBEC28E-4BEC-434E-A174-17C0E8C4B2B2}" type="slidenum">
-              <a:rPr lang="en-US" smtClean="0"/>
-              <a:pPr/>
-              <a:t>24</a:t>
-            </a:fld>
-            <a:endParaRPr lang="en-US" dirty="0"/>
-          </a:p>
-        </p:txBody>
-      </p:sp>
-      <p:sp>
-        <p:nvSpPr>
-          <p:cNvPr id="10" name="TextBox 9">
-            <a:extLst>
-              <a:ext uri="{FF2B5EF4-FFF2-40B4-BE49-F238E27FC236}">
-                <a16:creationId xmlns:a16="http://schemas.microsoft.com/office/drawing/2014/main" id="{534C8211-9328-4456-B99B-1D4B50CE6952}"/>
-              </a:ext>
-            </a:extLst>
-          </p:cNvPr>
-          <p:cNvSpPr txBox="1"/>
-          <p:nvPr/>
-        </p:nvSpPr>
-        <p:spPr>
-          <a:xfrm>
-            <a:off x="542078" y="84181"/>
-            <a:ext cx="5818771" cy="584775"/>
-          </a:xfrm>
-          <a:prstGeom prst="rect">
-            <a:avLst/>
-          </a:prstGeom>
-          <a:noFill/>
-        </p:spPr>
-        <p:txBody>
-          <a:bodyPr wrap="square" rtlCol="0">
-            <a:spAutoFit/>
-          </a:bodyPr>
-          <a:lstStyle/>
-          <a:p>
-            <a:r>
-              <a:rPr lang="en-US" sz="3200" b="1" dirty="0">
-                <a:solidFill>
-                  <a:srgbClr val="FF0000"/>
-                </a:solidFill>
-              </a:rPr>
-              <a:t>Plot Results</a:t>
-            </a:r>
-          </a:p>
-        </p:txBody>
-      </p:sp>
-      <p:pic>
-        <p:nvPicPr>
-          <p:cNvPr id="4" name="Picture 3">
-            <a:extLst>
-              <a:ext uri="{FF2B5EF4-FFF2-40B4-BE49-F238E27FC236}">
-                <a16:creationId xmlns:a16="http://schemas.microsoft.com/office/drawing/2014/main" id="{A41B6F00-D280-C93C-9456-FB93F44F1673}"/>
-              </a:ext>
-            </a:extLst>
-          </p:cNvPr>
-          <p:cNvPicPr>
-            <a:picLocks noChangeAspect="1"/>
-          </p:cNvPicPr>
-          <p:nvPr/>
-        </p:nvPicPr>
-        <p:blipFill>
-          <a:blip r:embed="rId2"/>
-          <a:stretch>
-            <a:fillRect/>
-          </a:stretch>
-        </p:blipFill>
-        <p:spPr>
-          <a:xfrm>
-            <a:off x="3690870" y="870989"/>
-            <a:ext cx="5339958" cy="5339958"/>
-          </a:xfrm>
-          <a:prstGeom prst="rect">
-            <a:avLst/>
-          </a:prstGeom>
-        </p:spPr>
-      </p:pic>
-    </p:spTree>
-    <p:extLst>
-      <p:ext uri="{BB962C8B-B14F-4D97-AF65-F5344CB8AC3E}">
-        <p14:creationId xmlns:p14="http://schemas.microsoft.com/office/powerpoint/2010/main" val="4140665588"/>
-      </p:ext>
-    </p:extLst>
-  </p:cSld>
-  <p:clrMapOvr>
-    <a:masterClrMapping/>
-  </p:clrMapOvr>
-</p:sld>
-</file>
-
-<file path=ppt/slides/slide25.xml><?xml version="1.0" encoding="utf-8"?>
-<p:sld xmlns:a="http://schemas.openxmlformats.org/drawingml/2006/main" xmlns:r="http://schemas.openxmlformats.org/officeDocument/2006/relationships" xmlns:p="http://schemas.openxmlformats.org/presentationml/2006/main">
-  <p:cSld>
-    <p:spTree>
-      <p:nvGrpSpPr>
-        <p:cNvPr id="1" name="">
-          <a:extLst>
-            <a:ext uri="{FF2B5EF4-FFF2-40B4-BE49-F238E27FC236}">
-              <a16:creationId xmlns:a16="http://schemas.microsoft.com/office/drawing/2014/main" id="{694C0356-701C-EDD8-4B18-6540E4E9362D}"/>
-            </a:ext>
-          </a:extLst>
-        </p:cNvPr>
-        <p:cNvGrpSpPr/>
-        <p:nvPr/>
-      </p:nvGrpSpPr>
-      <p:grpSpPr>
-        <a:xfrm>
-          <a:off x="0" y="0"/>
-          <a:ext cx="0" cy="0"/>
-          <a:chOff x="0" y="0"/>
-          <a:chExt cx="0" cy="0"/>
-        </a:xfrm>
-      </p:grpSpPr>
-      <p:sp>
-        <p:nvSpPr>
-          <p:cNvPr id="2" name="Slide Number Placeholder 1">
-            <a:extLst>
-              <a:ext uri="{FF2B5EF4-FFF2-40B4-BE49-F238E27FC236}">
-                <a16:creationId xmlns:a16="http://schemas.microsoft.com/office/drawing/2014/main" id="{4081E3AC-A4D6-6544-81A4-752BC22D25EE}"/>
-              </a:ext>
-            </a:extLst>
-          </p:cNvPr>
-          <p:cNvSpPr>
-            <a:spLocks noGrp="1"/>
-          </p:cNvSpPr>
-          <p:nvPr>
-            <p:ph type="sldNum" sz="quarter" idx="12"/>
-          </p:nvPr>
-        </p:nvSpPr>
-        <p:spPr>
-          <a:xfrm>
-            <a:off x="11525877" y="6404419"/>
-            <a:ext cx="620843" cy="365125"/>
-          </a:xfrm>
-        </p:spPr>
-        <p:txBody>
-          <a:bodyPr/>
-          <a:lstStyle/>
-          <a:p>
-            <a:fld id="{8FBEC28E-4BEC-434E-A174-17C0E8C4B2B2}" type="slidenum">
-              <a:rPr lang="en-US" smtClean="0"/>
-              <a:pPr/>
-              <a:t>25</a:t>
-            </a:fld>
-            <a:endParaRPr lang="en-US" dirty="0"/>
-          </a:p>
-        </p:txBody>
-      </p:sp>
-      <p:sp>
-        <p:nvSpPr>
-          <p:cNvPr id="10" name="TextBox 9">
-            <a:extLst>
-              <a:ext uri="{FF2B5EF4-FFF2-40B4-BE49-F238E27FC236}">
-                <a16:creationId xmlns:a16="http://schemas.microsoft.com/office/drawing/2014/main" id="{FF22953D-E0CB-19E5-E0A3-45A615B35888}"/>
-              </a:ext>
-            </a:extLst>
-          </p:cNvPr>
-          <p:cNvSpPr txBox="1"/>
-          <p:nvPr/>
-        </p:nvSpPr>
-        <p:spPr>
-          <a:xfrm>
-            <a:off x="542078" y="84181"/>
-            <a:ext cx="5818771" cy="584775"/>
-          </a:xfrm>
-          <a:prstGeom prst="rect">
-            <a:avLst/>
-          </a:prstGeom>
-          <a:noFill/>
-        </p:spPr>
-        <p:txBody>
-          <a:bodyPr wrap="square" rtlCol="0">
-            <a:spAutoFit/>
-          </a:bodyPr>
-          <a:lstStyle/>
-          <a:p>
-            <a:r>
-              <a:rPr lang="en-US" sz="3200" b="1" dirty="0">
-                <a:solidFill>
-                  <a:srgbClr val="FF0000"/>
-                </a:solidFill>
-              </a:rPr>
-              <a:t>Plot Results</a:t>
-            </a:r>
-          </a:p>
-        </p:txBody>
-      </p:sp>
-      <p:pic>
-        <p:nvPicPr>
-          <p:cNvPr id="4" name="Picture 3">
-            <a:extLst>
-              <a:ext uri="{FF2B5EF4-FFF2-40B4-BE49-F238E27FC236}">
-                <a16:creationId xmlns:a16="http://schemas.microsoft.com/office/drawing/2014/main" id="{A4FC5BFE-73CA-4AF4-92DF-35DE34A9A689}"/>
-              </a:ext>
-            </a:extLst>
-          </p:cNvPr>
-          <p:cNvPicPr>
-            <a:picLocks noChangeAspect="1"/>
-          </p:cNvPicPr>
-          <p:nvPr/>
-        </p:nvPicPr>
-        <p:blipFill>
-          <a:blip r:embed="rId2"/>
-          <a:stretch>
-            <a:fillRect/>
-          </a:stretch>
-        </p:blipFill>
-        <p:spPr>
-          <a:xfrm>
-            <a:off x="3670561" y="880265"/>
-            <a:ext cx="5380576" cy="5380576"/>
-          </a:xfrm>
-          <a:prstGeom prst="rect">
-            <a:avLst/>
-          </a:prstGeom>
-        </p:spPr>
-      </p:pic>
-    </p:spTree>
-    <p:extLst>
-      <p:ext uri="{BB962C8B-B14F-4D97-AF65-F5344CB8AC3E}">
-        <p14:creationId xmlns:p14="http://schemas.microsoft.com/office/powerpoint/2010/main" val="1960264867"/>
-      </p:ext>
-    </p:extLst>
-  </p:cSld>
-  <p:clrMapOvr>
-    <a:masterClrMapping/>
-  </p:clrMapOvr>
-</p:sld>
-</file>
-
-<file path=ppt/slides/slide26.xml><?xml version="1.0" encoding="utf-8"?>
-<p:sld xmlns:a="http://schemas.openxmlformats.org/drawingml/2006/main" xmlns:r="http://schemas.openxmlformats.org/officeDocument/2006/relationships" xmlns:p="http://schemas.openxmlformats.org/presentationml/2006/main">
-  <p:cSld>
-    <p:spTree>
-      <p:nvGrpSpPr>
-        <p:cNvPr id="1" name="">
-          <a:extLst>
-            <a:ext uri="{FF2B5EF4-FFF2-40B4-BE49-F238E27FC236}">
-              <a16:creationId xmlns:a16="http://schemas.microsoft.com/office/drawing/2014/main" id="{28A94D73-8F5A-3034-C5D9-4F56A3EA428A}"/>
-            </a:ext>
-          </a:extLst>
-        </p:cNvPr>
-        <p:cNvGrpSpPr/>
-        <p:nvPr/>
-      </p:nvGrpSpPr>
-      <p:grpSpPr>
-        <a:xfrm>
-          <a:off x="0" y="0"/>
-          <a:ext cx="0" cy="0"/>
-          <a:chOff x="0" y="0"/>
-          <a:chExt cx="0" cy="0"/>
-        </a:xfrm>
-      </p:grpSpPr>
-      <p:sp>
-        <p:nvSpPr>
-          <p:cNvPr id="2" name="Slide Number Placeholder 1">
-            <a:extLst>
-              <a:ext uri="{FF2B5EF4-FFF2-40B4-BE49-F238E27FC236}">
-                <a16:creationId xmlns:a16="http://schemas.microsoft.com/office/drawing/2014/main" id="{AAA222ED-4BF4-CD66-6064-EF72B1B365D7}"/>
-              </a:ext>
-            </a:extLst>
-          </p:cNvPr>
-          <p:cNvSpPr>
-            <a:spLocks noGrp="1"/>
-          </p:cNvSpPr>
-          <p:nvPr>
-            <p:ph type="sldNum" sz="quarter" idx="12"/>
-          </p:nvPr>
-        </p:nvSpPr>
-        <p:spPr>
-          <a:xfrm>
-            <a:off x="11525877" y="6404419"/>
-            <a:ext cx="620843" cy="365125"/>
-          </a:xfrm>
-        </p:spPr>
-        <p:txBody>
-          <a:bodyPr/>
-          <a:lstStyle/>
-          <a:p>
-            <a:fld id="{8FBEC28E-4BEC-434E-A174-17C0E8C4B2B2}" type="slidenum">
-              <a:rPr lang="en-US" smtClean="0"/>
-              <a:pPr/>
-              <a:t>26</a:t>
-            </a:fld>
-            <a:endParaRPr lang="en-US" dirty="0"/>
-          </a:p>
-        </p:txBody>
-      </p:sp>
-      <p:sp>
-        <p:nvSpPr>
-          <p:cNvPr id="10" name="TextBox 9">
-            <a:extLst>
-              <a:ext uri="{FF2B5EF4-FFF2-40B4-BE49-F238E27FC236}">
-                <a16:creationId xmlns:a16="http://schemas.microsoft.com/office/drawing/2014/main" id="{3D492094-9E48-A369-70DB-26BA9AB29979}"/>
-              </a:ext>
-            </a:extLst>
-          </p:cNvPr>
-          <p:cNvSpPr txBox="1"/>
-          <p:nvPr/>
-        </p:nvSpPr>
-        <p:spPr>
-          <a:xfrm>
-            <a:off x="542078" y="84181"/>
-            <a:ext cx="5818771" cy="584775"/>
-          </a:xfrm>
-          <a:prstGeom prst="rect">
-            <a:avLst/>
-          </a:prstGeom>
-          <a:noFill/>
-        </p:spPr>
-        <p:txBody>
-          <a:bodyPr wrap="square" rtlCol="0">
-            <a:spAutoFit/>
-          </a:bodyPr>
-          <a:lstStyle/>
-          <a:p>
-            <a:r>
-              <a:rPr lang="en-US" sz="3200" b="1" dirty="0">
-                <a:solidFill>
-                  <a:srgbClr val="FF0000"/>
-                </a:solidFill>
-              </a:rPr>
-              <a:t>Plot Results</a:t>
-            </a:r>
-          </a:p>
-        </p:txBody>
-      </p:sp>
-      <p:pic>
-        <p:nvPicPr>
-          <p:cNvPr id="4" name="Picture 3">
-            <a:extLst>
-              <a:ext uri="{FF2B5EF4-FFF2-40B4-BE49-F238E27FC236}">
-                <a16:creationId xmlns:a16="http://schemas.microsoft.com/office/drawing/2014/main" id="{0D17E693-6C98-015C-EC6B-E3EC5ED90970}"/>
-              </a:ext>
-            </a:extLst>
-          </p:cNvPr>
-          <p:cNvPicPr>
-            <a:picLocks noChangeAspect="1"/>
-          </p:cNvPicPr>
-          <p:nvPr/>
-        </p:nvPicPr>
-        <p:blipFill>
-          <a:blip r:embed="rId2"/>
-          <a:stretch>
-            <a:fillRect/>
-          </a:stretch>
-        </p:blipFill>
-        <p:spPr>
-          <a:xfrm>
-            <a:off x="3652690" y="872515"/>
-            <a:ext cx="5416318" cy="5416318"/>
-          </a:xfrm>
-          <a:prstGeom prst="rect">
-            <a:avLst/>
-          </a:prstGeom>
-        </p:spPr>
-      </p:pic>
-    </p:spTree>
-    <p:extLst>
-      <p:ext uri="{BB962C8B-B14F-4D97-AF65-F5344CB8AC3E}">
-        <p14:creationId xmlns:p14="http://schemas.microsoft.com/office/powerpoint/2010/main" val="2513734567"/>
-      </p:ext>
-    </p:extLst>
-  </p:cSld>
-  <p:clrMapOvr>
-    <a:masterClrMapping/>
-  </p:clrMapOvr>
-</p:sld>
-</file>
-
-<file path=ppt/slides/slide27.xml><?xml version="1.0" encoding="utf-8"?>
-<p:sld xmlns:a="http://schemas.openxmlformats.org/drawingml/2006/main" xmlns:r="http://schemas.openxmlformats.org/officeDocument/2006/relationships" xmlns:p="http://schemas.openxmlformats.org/presentationml/2006/main">
-  <p:cSld>
-    <p:spTree>
-      <p:nvGrpSpPr>
-        <p:cNvPr id="1" name="">
-          <a:extLst>
-            <a:ext uri="{FF2B5EF4-FFF2-40B4-BE49-F238E27FC236}">
-              <a16:creationId xmlns:a16="http://schemas.microsoft.com/office/drawing/2014/main" id="{82A5E164-C8CD-8B66-F64C-07182B17D14D}"/>
-            </a:ext>
-          </a:extLst>
-        </p:cNvPr>
-        <p:cNvGrpSpPr/>
-        <p:nvPr/>
-      </p:nvGrpSpPr>
-      <p:grpSpPr>
-        <a:xfrm>
-          <a:off x="0" y="0"/>
-          <a:ext cx="0" cy="0"/>
-          <a:chOff x="0" y="0"/>
-          <a:chExt cx="0" cy="0"/>
-        </a:xfrm>
-      </p:grpSpPr>
-      <p:sp>
-        <p:nvSpPr>
-          <p:cNvPr id="2" name="Slide Number Placeholder 1">
-            <a:extLst>
-              <a:ext uri="{FF2B5EF4-FFF2-40B4-BE49-F238E27FC236}">
-                <a16:creationId xmlns:a16="http://schemas.microsoft.com/office/drawing/2014/main" id="{57CC6B1B-0FB3-5A97-6B13-0375CDA399BD}"/>
-              </a:ext>
-            </a:extLst>
-          </p:cNvPr>
-          <p:cNvSpPr>
-            <a:spLocks noGrp="1"/>
-          </p:cNvSpPr>
-          <p:nvPr>
-            <p:ph type="sldNum" sz="quarter" idx="12"/>
-          </p:nvPr>
-        </p:nvSpPr>
-        <p:spPr>
-          <a:xfrm>
-            <a:off x="11525877" y="6404419"/>
-            <a:ext cx="620843" cy="365125"/>
-          </a:xfrm>
-        </p:spPr>
-        <p:txBody>
-          <a:bodyPr/>
-          <a:lstStyle/>
-          <a:p>
-            <a:fld id="{8FBEC28E-4BEC-434E-A174-17C0E8C4B2B2}" type="slidenum">
-              <a:rPr lang="en-US" smtClean="0"/>
-              <a:pPr/>
-              <a:t>27</a:t>
-            </a:fld>
-            <a:endParaRPr lang="en-US" dirty="0"/>
-          </a:p>
-        </p:txBody>
-      </p:sp>
-      <p:sp>
-        <p:nvSpPr>
-          <p:cNvPr id="10" name="TextBox 9">
-            <a:extLst>
-              <a:ext uri="{FF2B5EF4-FFF2-40B4-BE49-F238E27FC236}">
-                <a16:creationId xmlns:a16="http://schemas.microsoft.com/office/drawing/2014/main" id="{1533DDE0-5929-21EE-F8E4-1F1EE06E297A}"/>
-              </a:ext>
-            </a:extLst>
-          </p:cNvPr>
-          <p:cNvSpPr txBox="1"/>
-          <p:nvPr/>
-        </p:nvSpPr>
-        <p:spPr>
-          <a:xfrm>
-            <a:off x="542078" y="84181"/>
-            <a:ext cx="5818771" cy="584775"/>
-          </a:xfrm>
-          <a:prstGeom prst="rect">
-            <a:avLst/>
-          </a:prstGeom>
-          <a:noFill/>
-        </p:spPr>
-        <p:txBody>
-          <a:bodyPr wrap="square" rtlCol="0">
-            <a:spAutoFit/>
-          </a:bodyPr>
-          <a:lstStyle/>
-          <a:p>
-            <a:r>
-              <a:rPr lang="en-US" sz="3200" b="1" dirty="0">
-                <a:solidFill>
-                  <a:srgbClr val="FF0000"/>
-                </a:solidFill>
-              </a:rPr>
-              <a:t>Plot Results</a:t>
-            </a:r>
-          </a:p>
-        </p:txBody>
-      </p:sp>
-      <p:pic>
-        <p:nvPicPr>
-          <p:cNvPr id="4" name="Picture 3">
-            <a:extLst>
-              <a:ext uri="{FF2B5EF4-FFF2-40B4-BE49-F238E27FC236}">
-                <a16:creationId xmlns:a16="http://schemas.microsoft.com/office/drawing/2014/main" id="{70E0DFA1-0815-1744-038E-D2E4C1C07968}"/>
-              </a:ext>
-            </a:extLst>
-          </p:cNvPr>
-          <p:cNvPicPr>
-            <a:picLocks noChangeAspect="1"/>
-          </p:cNvPicPr>
-          <p:nvPr/>
-        </p:nvPicPr>
-        <p:blipFill>
-          <a:blip r:embed="rId2"/>
-          <a:stretch>
-            <a:fillRect/>
-          </a:stretch>
-        </p:blipFill>
-        <p:spPr>
-          <a:xfrm>
-            <a:off x="3650306" y="821094"/>
-            <a:ext cx="5421086" cy="5421086"/>
-          </a:xfrm>
-          <a:prstGeom prst="rect">
-            <a:avLst/>
-          </a:prstGeom>
-        </p:spPr>
-      </p:pic>
-    </p:spTree>
-    <p:extLst>
-      <p:ext uri="{BB962C8B-B14F-4D97-AF65-F5344CB8AC3E}">
-        <p14:creationId xmlns:p14="http://schemas.microsoft.com/office/powerpoint/2010/main" val="3259785755"/>
-      </p:ext>
-    </p:extLst>
-  </p:cSld>
-  <p:clrMapOvr>
-    <a:masterClrMapping/>
-  </p:clrMapOvr>
-</p:sld>
-</file>
-
-<file path=ppt/slides/slide28.xml><?xml version="1.0" encoding="utf-8"?>
-<p:sld xmlns:a="http://schemas.openxmlformats.org/drawingml/2006/main" xmlns:r="http://schemas.openxmlformats.org/officeDocument/2006/relationships" xmlns:p="http://schemas.openxmlformats.org/presentationml/2006/main">
-  <p:cSld>
-    <p:spTree>
-      <p:nvGrpSpPr>
-        <p:cNvPr id="1" name="">
-          <a:extLst>
-            <a:ext uri="{FF2B5EF4-FFF2-40B4-BE49-F238E27FC236}">
-              <a16:creationId xmlns:a16="http://schemas.microsoft.com/office/drawing/2014/main" id="{8CF3A853-116B-4E61-F9F5-2309E4C84CD7}"/>
-            </a:ext>
-          </a:extLst>
-        </p:cNvPr>
-        <p:cNvGrpSpPr/>
-        <p:nvPr/>
-      </p:nvGrpSpPr>
-      <p:grpSpPr>
-        <a:xfrm>
-          <a:off x="0" y="0"/>
-          <a:ext cx="0" cy="0"/>
-          <a:chOff x="0" y="0"/>
-          <a:chExt cx="0" cy="0"/>
-        </a:xfrm>
-      </p:grpSpPr>
-      <p:sp>
-        <p:nvSpPr>
-          <p:cNvPr id="2" name="Slide Number Placeholder 1">
-            <a:extLst>
-              <a:ext uri="{FF2B5EF4-FFF2-40B4-BE49-F238E27FC236}">
-                <a16:creationId xmlns:a16="http://schemas.microsoft.com/office/drawing/2014/main" id="{A3CB7FF6-1A36-8706-B50C-CED1A90E78E5}"/>
-              </a:ext>
-            </a:extLst>
-          </p:cNvPr>
-          <p:cNvSpPr>
-            <a:spLocks noGrp="1"/>
-          </p:cNvSpPr>
-          <p:nvPr>
-            <p:ph type="sldNum" sz="quarter" idx="12"/>
-          </p:nvPr>
-        </p:nvSpPr>
-        <p:spPr>
-          <a:xfrm>
-            <a:off x="11525877" y="6404419"/>
-            <a:ext cx="620843" cy="365125"/>
-          </a:xfrm>
-        </p:spPr>
-        <p:txBody>
-          <a:bodyPr/>
-          <a:lstStyle/>
-          <a:p>
-            <a:fld id="{8FBEC28E-4BEC-434E-A174-17C0E8C4B2B2}" type="slidenum">
-              <a:rPr lang="en-US" smtClean="0"/>
-              <a:pPr/>
-              <a:t>28</a:t>
-            </a:fld>
-            <a:endParaRPr lang="en-US" dirty="0"/>
-          </a:p>
-        </p:txBody>
-      </p:sp>
-      <p:sp>
-        <p:nvSpPr>
-          <p:cNvPr id="10" name="TextBox 9">
-            <a:extLst>
-              <a:ext uri="{FF2B5EF4-FFF2-40B4-BE49-F238E27FC236}">
-                <a16:creationId xmlns:a16="http://schemas.microsoft.com/office/drawing/2014/main" id="{5E03E601-05B3-0BC7-F763-0383DDC54AC6}"/>
-              </a:ext>
-            </a:extLst>
-          </p:cNvPr>
-          <p:cNvSpPr txBox="1"/>
-          <p:nvPr/>
-        </p:nvSpPr>
-        <p:spPr>
-          <a:xfrm>
-            <a:off x="542078" y="84181"/>
-            <a:ext cx="5818771" cy="584775"/>
-          </a:xfrm>
-          <a:prstGeom prst="rect">
-            <a:avLst/>
-          </a:prstGeom>
-          <a:noFill/>
-        </p:spPr>
-        <p:txBody>
-          <a:bodyPr wrap="square" rtlCol="0">
-            <a:spAutoFit/>
-          </a:bodyPr>
-          <a:lstStyle/>
-          <a:p>
-            <a:r>
-              <a:rPr lang="en-US" sz="3200" b="1" dirty="0">
-                <a:solidFill>
-                  <a:srgbClr val="FF0000"/>
-                </a:solidFill>
-              </a:rPr>
-              <a:t>Model Performances evaluations</a:t>
+              <a:t>Model Performances Evaluations</a:t>
             </a:r>
           </a:p>
         </p:txBody>
@@ -12071,7 +11243,7 @@
 </p:sld>
 </file>
 
-<file path=ppt/slides/slide29.xml><?xml version="1.0" encoding="utf-8"?>
+<file path=ppt/slides/slide21.xml><?xml version="1.0" encoding="utf-8"?>
 <p:sld xmlns:a="http://schemas.openxmlformats.org/drawingml/2006/main" xmlns:r="http://schemas.openxmlformats.org/officeDocument/2006/relationships" xmlns:p="http://schemas.openxmlformats.org/presentationml/2006/main">
   <p:cSld>
     <p:spTree>
@@ -12123,7 +11295,7 @@
             <a:fld id="{8FBEC28E-4BEC-434E-A174-17C0E8C4B2B2}" type="slidenum">
               <a:rPr lang="en-US" smtClean="0"/>
               <a:pPr/>
-              <a:t>29</a:t>
+              <a:t>21</a:t>
             </a:fld>
             <a:endParaRPr lang="en-US" dirty="0"/>
           </a:p>
@@ -13439,6 +12611,568 @@
 </p:sld>
 </file>
 
+<file path=ppt/slides/slide22.xml><?xml version="1.0" encoding="utf-8"?>
+<p:sld xmlns:a="http://schemas.openxmlformats.org/drawingml/2006/main" xmlns:r="http://schemas.openxmlformats.org/officeDocument/2006/relationships" xmlns:p="http://schemas.openxmlformats.org/presentationml/2006/main">
+  <p:cSld>
+    <p:spTree>
+      <p:nvGrpSpPr>
+        <p:cNvPr id="1" name="">
+          <a:extLst>
+            <a:ext uri="{FF2B5EF4-FFF2-40B4-BE49-F238E27FC236}">
+              <a16:creationId xmlns:a16="http://schemas.microsoft.com/office/drawing/2014/main" id="{5BCD73CA-EFDF-DE20-F70C-9B23B251245F}"/>
+            </a:ext>
+          </a:extLst>
+        </p:cNvPr>
+        <p:cNvGrpSpPr/>
+        <p:nvPr/>
+      </p:nvGrpSpPr>
+      <p:grpSpPr>
+        <a:xfrm>
+          <a:off x="0" y="0"/>
+          <a:ext cx="0" cy="0"/>
+          <a:chOff x="0" y="0"/>
+          <a:chExt cx="0" cy="0"/>
+        </a:xfrm>
+      </p:grpSpPr>
+      <p:sp>
+        <p:nvSpPr>
+          <p:cNvPr id="2" name="Slide Number Placeholder 1">
+            <a:extLst>
+              <a:ext uri="{FF2B5EF4-FFF2-40B4-BE49-F238E27FC236}">
+                <a16:creationId xmlns:a16="http://schemas.microsoft.com/office/drawing/2014/main" id="{1B0634FF-C037-58A0-C233-C98B3D677B64}"/>
+              </a:ext>
+            </a:extLst>
+          </p:cNvPr>
+          <p:cNvSpPr>
+            <a:spLocks noGrp="1"/>
+          </p:cNvSpPr>
+          <p:nvPr>
+            <p:ph type="sldNum" sz="quarter" idx="12"/>
+          </p:nvPr>
+        </p:nvSpPr>
+        <p:spPr>
+          <a:xfrm>
+            <a:off x="11525877" y="6404419"/>
+            <a:ext cx="620843" cy="365125"/>
+          </a:xfrm>
+        </p:spPr>
+        <p:txBody>
+          <a:bodyPr/>
+          <a:lstStyle/>
+          <a:p>
+            <a:fld id="{8FBEC28E-4BEC-434E-A174-17C0E8C4B2B2}" type="slidenum">
+              <a:rPr lang="en-US" smtClean="0"/>
+              <a:pPr/>
+              <a:t>22</a:t>
+            </a:fld>
+            <a:endParaRPr lang="en-US" dirty="0"/>
+          </a:p>
+        </p:txBody>
+      </p:sp>
+      <p:sp>
+        <p:nvSpPr>
+          <p:cNvPr id="10" name="TextBox 9">
+            <a:extLst>
+              <a:ext uri="{FF2B5EF4-FFF2-40B4-BE49-F238E27FC236}">
+                <a16:creationId xmlns:a16="http://schemas.microsoft.com/office/drawing/2014/main" id="{8633FCEF-75CB-24B8-EE13-BA3683B7D706}"/>
+              </a:ext>
+            </a:extLst>
+          </p:cNvPr>
+          <p:cNvSpPr txBox="1"/>
+          <p:nvPr/>
+        </p:nvSpPr>
+        <p:spPr>
+          <a:xfrm>
+            <a:off x="542078" y="84181"/>
+            <a:ext cx="5818771" cy="584775"/>
+          </a:xfrm>
+          <a:prstGeom prst="rect">
+            <a:avLst/>
+          </a:prstGeom>
+          <a:noFill/>
+        </p:spPr>
+        <p:txBody>
+          <a:bodyPr wrap="square" rtlCol="0">
+            <a:spAutoFit/>
+          </a:bodyPr>
+          <a:lstStyle/>
+          <a:p>
+            <a:r>
+              <a:rPr lang="en-US" sz="3200" b="1" dirty="0">
+                <a:solidFill>
+                  <a:srgbClr val="FF0000"/>
+                </a:solidFill>
+              </a:rPr>
+              <a:t>Conclusions</a:t>
+            </a:r>
+          </a:p>
+        </p:txBody>
+      </p:sp>
+      <p:sp>
+        <p:nvSpPr>
+          <p:cNvPr id="3" name="TextBox 2">
+            <a:extLst>
+              <a:ext uri="{FF2B5EF4-FFF2-40B4-BE49-F238E27FC236}">
+                <a16:creationId xmlns:a16="http://schemas.microsoft.com/office/drawing/2014/main" id="{714CF3D9-C1A6-6D56-25BE-5C11EB93871A}"/>
+              </a:ext>
+            </a:extLst>
+          </p:cNvPr>
+          <p:cNvSpPr txBox="1"/>
+          <p:nvPr/>
+        </p:nvSpPr>
+        <p:spPr>
+          <a:xfrm>
+            <a:off x="923731" y="2136710"/>
+            <a:ext cx="9862457" cy="3477875"/>
+          </a:xfrm>
+          <a:prstGeom prst="rect">
+            <a:avLst/>
+          </a:prstGeom>
+          <a:noFill/>
+        </p:spPr>
+        <p:txBody>
+          <a:bodyPr wrap="square" rtlCol="0">
+            <a:spAutoFit/>
+          </a:bodyPr>
+          <a:lstStyle/>
+          <a:p>
+            <a:pPr marL="342900" indent="-342900">
+              <a:buFont typeface="Wingdings" panose="05000000000000000000" pitchFamily="2" charset="2"/>
+              <a:buChar char="ü"/>
+            </a:pPr>
+            <a:r>
+              <a:rPr lang="en-US" sz="2000" b="1" dirty="0"/>
+              <a:t>Machine Learning Effectiveness-</a:t>
+            </a:r>
+            <a:r>
+              <a:rPr lang="en-US" sz="2000" dirty="0"/>
+              <a:t> Models successfully predicted Ni–Cr mechanical properties (UTS, Yield Strength, E) with strong accuracy..</a:t>
+            </a:r>
+          </a:p>
+          <a:p>
+            <a:pPr marL="342900" indent="-342900">
+              <a:buFont typeface="Wingdings" panose="05000000000000000000" pitchFamily="2" charset="2"/>
+              <a:buChar char="ü"/>
+            </a:pPr>
+            <a:endParaRPr lang="en-US" sz="2000" dirty="0"/>
+          </a:p>
+          <a:p>
+            <a:pPr marL="342900" indent="-342900">
+              <a:buFont typeface="Wingdings" panose="05000000000000000000" pitchFamily="2" charset="2"/>
+              <a:buChar char="ü"/>
+            </a:pPr>
+            <a:r>
+              <a:rPr lang="en-US" sz="2000" b="1" dirty="0"/>
+              <a:t>High Predictive Power - </a:t>
+            </a:r>
+            <a:r>
+              <a:rPr lang="en-US" sz="2000" dirty="0"/>
+              <a:t>Achieved high R² values, confirming model reliability.</a:t>
+            </a:r>
+          </a:p>
+          <a:p>
+            <a:endParaRPr lang="en-IN" sz="2000" dirty="0"/>
+          </a:p>
+          <a:p>
+            <a:pPr marL="342900" indent="-342900">
+              <a:buFont typeface="Wingdings" panose="05000000000000000000" pitchFamily="2" charset="2"/>
+              <a:buChar char="ü"/>
+            </a:pPr>
+            <a:r>
+              <a:rPr lang="en-US" sz="2000" b="1" dirty="0"/>
+              <a:t>Data Source Validation -</a:t>
+            </a:r>
+            <a:r>
+              <a:rPr lang="en-US" sz="2000" dirty="0"/>
+              <a:t> Validated that data generated from </a:t>
+            </a:r>
+            <a:r>
+              <a:rPr lang="en-US" sz="2000" b="1" dirty="0"/>
+              <a:t>Molecular Dynamics (MD) simulations</a:t>
+            </a:r>
+            <a:r>
+              <a:rPr lang="en-US" sz="2000" dirty="0"/>
+              <a:t> is effective and reliable.</a:t>
+            </a:r>
+          </a:p>
+          <a:p>
+            <a:endParaRPr lang="en-US" sz="2000" dirty="0"/>
+          </a:p>
+          <a:p>
+            <a:pPr marL="342900" indent="-342900">
+              <a:buFont typeface="Wingdings" panose="05000000000000000000" pitchFamily="2" charset="2"/>
+              <a:buChar char="ü"/>
+            </a:pPr>
+            <a:r>
+              <a:rPr lang="en-US" sz="2000" b="1" dirty="0"/>
+              <a:t>Best Performer Identified -</a:t>
+            </a:r>
+            <a:r>
+              <a:rPr lang="en-US" sz="2000" dirty="0"/>
+              <a:t> </a:t>
+            </a:r>
+            <a:r>
+              <a:rPr lang="en-US" sz="2000" b="1" dirty="0"/>
+              <a:t>Random Forest</a:t>
+            </a:r>
+            <a:r>
+              <a:rPr lang="en-US" sz="2000" dirty="0"/>
+              <a:t> showed the highest overall predictive accuracy and interpretability among the tested models.</a:t>
+            </a:r>
+          </a:p>
+          <a:p>
+            <a:pPr marL="342900" indent="-342900">
+              <a:buFont typeface="Wingdings" panose="05000000000000000000" pitchFamily="2" charset="2"/>
+              <a:buChar char="ü"/>
+            </a:pPr>
+            <a:endParaRPr lang="en-IN" sz="2000" dirty="0"/>
+          </a:p>
+        </p:txBody>
+      </p:sp>
+      <p:pic>
+        <p:nvPicPr>
+          <p:cNvPr id="12298" name="Picture 10" descr="Premium Photo | Word Conclusion on torn paper Business concept | Presentation slides design, Torn paper, Slides design">
+            <a:extLst>
+              <a:ext uri="{FF2B5EF4-FFF2-40B4-BE49-F238E27FC236}">
+                <a16:creationId xmlns:a16="http://schemas.microsoft.com/office/drawing/2014/main" id="{C3197244-E4EF-5DEB-735B-461BDBF74CA9}"/>
+              </a:ext>
+            </a:extLst>
+          </p:cNvPr>
+          <p:cNvPicPr>
+            <a:picLocks noChangeAspect="1" noChangeArrowheads="1"/>
+          </p:cNvPicPr>
+          <p:nvPr/>
+        </p:nvPicPr>
+        <p:blipFill>
+          <a:blip r:embed="rId2">
+            <a:extLst>
+              <a:ext uri="{28A0092B-C50C-407E-A947-70E740481C1C}">
+                <a14:useLocalDpi xmlns:a14="http://schemas.microsoft.com/office/drawing/2010/main" val="0"/>
+              </a:ext>
+            </a:extLst>
+          </a:blip>
+          <a:srcRect/>
+          <a:stretch>
+            <a:fillRect/>
+          </a:stretch>
+        </p:blipFill>
+        <p:spPr bwMode="auto">
+          <a:xfrm>
+            <a:off x="9591869" y="804980"/>
+            <a:ext cx="2244429" cy="1093531"/>
+          </a:xfrm>
+          <a:prstGeom prst="rect">
+            <a:avLst/>
+          </a:prstGeom>
+          <a:noFill/>
+          <a:extLst>
+            <a:ext uri="{909E8E84-426E-40DD-AFC4-6F175D3DCCD1}">
+              <a14:hiddenFill xmlns:a14="http://schemas.microsoft.com/office/drawing/2010/main">
+                <a:solidFill>
+                  <a:srgbClr val="FFFFFF"/>
+                </a:solidFill>
+              </a14:hiddenFill>
+            </a:ext>
+          </a:extLst>
+        </p:spPr>
+      </p:pic>
+    </p:spTree>
+    <p:extLst>
+      <p:ext uri="{BB962C8B-B14F-4D97-AF65-F5344CB8AC3E}">
+        <p14:creationId xmlns:p14="http://schemas.microsoft.com/office/powerpoint/2010/main" val="684774973"/>
+      </p:ext>
+    </p:extLst>
+  </p:cSld>
+  <p:clrMapOvr>
+    <a:masterClrMapping/>
+  </p:clrMapOvr>
+</p:sld>
+</file>
+
+<file path=ppt/slides/slide23.xml><?xml version="1.0" encoding="utf-8"?>
+<p:sld xmlns:a="http://schemas.openxmlformats.org/drawingml/2006/main" xmlns:r="http://schemas.openxmlformats.org/officeDocument/2006/relationships" xmlns:p="http://schemas.openxmlformats.org/presentationml/2006/main">
+  <p:cSld>
+    <p:spTree>
+      <p:nvGrpSpPr>
+        <p:cNvPr id="1" name="">
+          <a:extLst>
+            <a:ext uri="{FF2B5EF4-FFF2-40B4-BE49-F238E27FC236}">
+              <a16:creationId xmlns:a16="http://schemas.microsoft.com/office/drawing/2014/main" id="{477ADE3B-9561-493E-0B03-673B6B30F59B}"/>
+            </a:ext>
+          </a:extLst>
+        </p:cNvPr>
+        <p:cNvGrpSpPr/>
+        <p:nvPr/>
+      </p:nvGrpSpPr>
+      <p:grpSpPr>
+        <a:xfrm>
+          <a:off x="0" y="0"/>
+          <a:ext cx="0" cy="0"/>
+          <a:chOff x="0" y="0"/>
+          <a:chExt cx="0" cy="0"/>
+        </a:xfrm>
+      </p:grpSpPr>
+      <p:sp>
+        <p:nvSpPr>
+          <p:cNvPr id="2" name="Slide Number Placeholder 1">
+            <a:extLst>
+              <a:ext uri="{FF2B5EF4-FFF2-40B4-BE49-F238E27FC236}">
+                <a16:creationId xmlns:a16="http://schemas.microsoft.com/office/drawing/2014/main" id="{7DF0DC17-2CAC-5EFA-F662-C5176D1BFA5B}"/>
+              </a:ext>
+            </a:extLst>
+          </p:cNvPr>
+          <p:cNvSpPr>
+            <a:spLocks noGrp="1"/>
+          </p:cNvSpPr>
+          <p:nvPr>
+            <p:ph type="sldNum" sz="quarter" idx="12"/>
+          </p:nvPr>
+        </p:nvSpPr>
+        <p:spPr>
+          <a:xfrm>
+            <a:off x="11525877" y="6404419"/>
+            <a:ext cx="620843" cy="365125"/>
+          </a:xfrm>
+        </p:spPr>
+        <p:txBody>
+          <a:bodyPr/>
+          <a:lstStyle/>
+          <a:p>
+            <a:fld id="{8FBEC28E-4BEC-434E-A174-17C0E8C4B2B2}" type="slidenum">
+              <a:rPr lang="en-US" smtClean="0"/>
+              <a:pPr/>
+              <a:t>23</a:t>
+            </a:fld>
+            <a:endParaRPr lang="en-US" dirty="0"/>
+          </a:p>
+        </p:txBody>
+      </p:sp>
+      <p:sp>
+        <p:nvSpPr>
+          <p:cNvPr id="10" name="TextBox 9">
+            <a:extLst>
+              <a:ext uri="{FF2B5EF4-FFF2-40B4-BE49-F238E27FC236}">
+                <a16:creationId xmlns:a16="http://schemas.microsoft.com/office/drawing/2014/main" id="{98D0883A-217B-575E-86E2-F9E85C979C91}"/>
+              </a:ext>
+            </a:extLst>
+          </p:cNvPr>
+          <p:cNvSpPr txBox="1"/>
+          <p:nvPr/>
+        </p:nvSpPr>
+        <p:spPr>
+          <a:xfrm>
+            <a:off x="542078" y="84181"/>
+            <a:ext cx="5818771" cy="584775"/>
+          </a:xfrm>
+          <a:prstGeom prst="rect">
+            <a:avLst/>
+          </a:prstGeom>
+          <a:noFill/>
+        </p:spPr>
+        <p:txBody>
+          <a:bodyPr wrap="square" rtlCol="0">
+            <a:spAutoFit/>
+          </a:bodyPr>
+          <a:lstStyle/>
+          <a:p>
+            <a:r>
+              <a:rPr lang="en-US" sz="3200" b="1" dirty="0">
+                <a:solidFill>
+                  <a:srgbClr val="FF0000"/>
+                </a:solidFill>
+              </a:rPr>
+              <a:t>References</a:t>
+            </a:r>
+          </a:p>
+        </p:txBody>
+      </p:sp>
+      <p:sp>
+        <p:nvSpPr>
+          <p:cNvPr id="4" name="TextBox 3">
+            <a:extLst>
+              <a:ext uri="{FF2B5EF4-FFF2-40B4-BE49-F238E27FC236}">
+                <a16:creationId xmlns:a16="http://schemas.microsoft.com/office/drawing/2014/main" id="{9DD3EF1E-4221-C6D4-BAF6-0BA618D031A2}"/>
+              </a:ext>
+            </a:extLst>
+          </p:cNvPr>
+          <p:cNvSpPr txBox="1"/>
+          <p:nvPr/>
+        </p:nvSpPr>
+        <p:spPr>
+          <a:xfrm>
+            <a:off x="923731" y="2192694"/>
+            <a:ext cx="9862457" cy="369332"/>
+          </a:xfrm>
+          <a:prstGeom prst="rect">
+            <a:avLst/>
+          </a:prstGeom>
+          <a:noFill/>
+        </p:spPr>
+        <p:txBody>
+          <a:bodyPr wrap="square" rtlCol="0">
+            <a:spAutoFit/>
+          </a:bodyPr>
+          <a:lstStyle/>
+          <a:p>
+            <a:endParaRPr lang="en-IN" dirty="0"/>
+          </a:p>
+        </p:txBody>
+      </p:sp>
+      <p:sp>
+        <p:nvSpPr>
+          <p:cNvPr id="7" name="TextBox 6">
+            <a:extLst>
+              <a:ext uri="{FF2B5EF4-FFF2-40B4-BE49-F238E27FC236}">
+                <a16:creationId xmlns:a16="http://schemas.microsoft.com/office/drawing/2014/main" id="{283D230E-01CE-4005-A418-A24A9D7379F5}"/>
+              </a:ext>
+            </a:extLst>
+          </p:cNvPr>
+          <p:cNvSpPr txBox="1"/>
+          <p:nvPr/>
+        </p:nvSpPr>
+        <p:spPr>
+          <a:xfrm>
+            <a:off x="1819469" y="1754155"/>
+            <a:ext cx="8434874" cy="2862322"/>
+          </a:xfrm>
+          <a:prstGeom prst="rect">
+            <a:avLst/>
+          </a:prstGeom>
+          <a:noFill/>
+        </p:spPr>
+        <p:txBody>
+          <a:bodyPr wrap="square" rtlCol="0">
+            <a:spAutoFit/>
+          </a:bodyPr>
+          <a:lstStyle/>
+          <a:p>
+            <a:pPr marL="285750" indent="-285750">
+              <a:buFont typeface="Arial" panose="020B0604020202020204" pitchFamily="34" charset="0"/>
+              <a:buChar char="•"/>
+            </a:pPr>
+            <a:r>
+              <a:rPr lang="en-US" sz="2000" b="1" dirty="0"/>
+              <a:t>Machine Learning Algorithms:</a:t>
+            </a:r>
+            <a:r>
+              <a:rPr lang="en-US" sz="2000" dirty="0"/>
+              <a:t> </a:t>
+            </a:r>
+          </a:p>
+          <a:p>
+            <a:r>
+              <a:rPr lang="en-US" sz="2000" dirty="0"/>
+              <a:t> 	Pedregosa, F. </a:t>
+            </a:r>
+            <a:r>
+              <a:rPr lang="en-US" sz="2000" i="1" dirty="0"/>
+              <a:t>et al.</a:t>
+            </a:r>
+            <a:r>
+              <a:rPr lang="en-US" sz="2000" dirty="0"/>
+              <a:t>, “Scikit-learn: Machine Learning in Python,” </a:t>
+            </a:r>
+            <a:r>
+              <a:rPr lang="en-US" sz="2000" i="1" dirty="0"/>
+              <a:t>J. 	Mach.  Learn. Res.</a:t>
+            </a:r>
+            <a:r>
+              <a:rPr lang="en-US" sz="2000" dirty="0"/>
+              <a:t>, 2011.</a:t>
+            </a:r>
+          </a:p>
+          <a:p>
+            <a:pPr marL="285750" indent="-285750">
+              <a:buFont typeface="Arial" panose="020B0604020202020204" pitchFamily="34" charset="0"/>
+              <a:buChar char="•"/>
+            </a:pPr>
+            <a:r>
+              <a:rPr lang="en-US" sz="2000" b="1" dirty="0"/>
+              <a:t>Random Forest Foundation:</a:t>
+            </a:r>
+            <a:r>
+              <a:rPr lang="en-US" sz="2000" dirty="0"/>
+              <a:t> </a:t>
+            </a:r>
+          </a:p>
+          <a:p>
+            <a:pPr lvl="1"/>
+            <a:r>
+              <a:rPr lang="en-US" sz="2000" dirty="0"/>
+              <a:t> 	Breiman, L. “Random Forests,” </a:t>
+            </a:r>
+            <a:r>
+              <a:rPr lang="en-US" sz="2000" i="1" dirty="0"/>
+              <a:t>Machine Learning</a:t>
+            </a:r>
+            <a:r>
+              <a:rPr lang="en-US" sz="2000" dirty="0"/>
+              <a:t>, 45(1), 5–32, 2001.</a:t>
+            </a:r>
+          </a:p>
+          <a:p>
+            <a:pPr marL="285750" indent="-285750">
+              <a:buFont typeface="Arial" panose="020B0604020202020204" pitchFamily="34" charset="0"/>
+              <a:buChar char="•"/>
+            </a:pPr>
+            <a:endParaRPr lang="en-US" sz="2000" dirty="0"/>
+          </a:p>
+          <a:p>
+            <a:pPr marL="285750" indent="-285750">
+              <a:buFont typeface="Arial" panose="020B0604020202020204" pitchFamily="34" charset="0"/>
+              <a:buChar char="•"/>
+            </a:pPr>
+            <a:r>
+              <a:rPr lang="en-IN" sz="2000" b="1" dirty="0"/>
+              <a:t>MD Simulation Data Source:  </a:t>
+            </a:r>
+            <a:r>
+              <a:rPr lang="en-IN" sz="2000" b="1" dirty="0">
+                <a:hlinkClick r:id="rId2"/>
+              </a:rPr>
+              <a:t>MD Simulation Github</a:t>
+            </a:r>
+            <a:endParaRPr lang="en-IN" sz="2000" dirty="0"/>
+          </a:p>
+          <a:p>
+            <a:pPr marL="285750" indent="-285750">
+              <a:buFont typeface="Arial" panose="020B0604020202020204" pitchFamily="34" charset="0"/>
+              <a:buChar char="•"/>
+            </a:pPr>
+            <a:endParaRPr lang="en-IN" sz="2000" dirty="0"/>
+          </a:p>
+          <a:p>
+            <a:pPr marL="285750" indent="-285750">
+              <a:buFont typeface="Arial" panose="020B0604020202020204" pitchFamily="34" charset="0"/>
+              <a:buChar char="•"/>
+            </a:pPr>
+            <a:r>
+              <a:rPr lang="en-IN" sz="2000" dirty="0"/>
+              <a:t>Project Github Repo: 	</a:t>
+            </a:r>
+            <a:r>
+              <a:rPr lang="en-IN" sz="2000" dirty="0">
+                <a:hlinkClick r:id="rId3"/>
+              </a:rPr>
+              <a:t>MLMI_Project </a:t>
+            </a:r>
+            <a:endParaRPr lang="en-IN" sz="2000" dirty="0"/>
+          </a:p>
+        </p:txBody>
+      </p:sp>
+    </p:spTree>
+    <p:extLst>
+      <p:ext uri="{BB962C8B-B14F-4D97-AF65-F5344CB8AC3E}">
+        <p14:creationId xmlns:p14="http://schemas.microsoft.com/office/powerpoint/2010/main" val="662604587"/>
+      </p:ext>
+    </p:extLst>
+  </p:cSld>
+  <p:clrMapOvr>
+    <a:masterClrMapping/>
+  </p:clrMapOvr>
+</p:sld>
+</file>
+
 <file path=ppt/slides/slide3.xml><?xml version="1.0" encoding="utf-8"?>
 <p:sld xmlns:a="http://schemas.openxmlformats.org/drawingml/2006/main" xmlns:r="http://schemas.openxmlformats.org/officeDocument/2006/relationships" xmlns:p="http://schemas.openxmlformats.org/presentationml/2006/main">
   <p:cSld>
@@ -14277,614 +14011,6 @@
 </p:sld>
 </file>
 
-<file path=ppt/slides/slide30.xml><?xml version="1.0" encoding="utf-8"?>
-<p:sld xmlns:a="http://schemas.openxmlformats.org/drawingml/2006/main" xmlns:r="http://schemas.openxmlformats.org/officeDocument/2006/relationships" xmlns:p="http://schemas.openxmlformats.org/presentationml/2006/main">
-  <p:cSld>
-    <p:spTree>
-      <p:nvGrpSpPr>
-        <p:cNvPr id="1" name="">
-          <a:extLst>
-            <a:ext uri="{FF2B5EF4-FFF2-40B4-BE49-F238E27FC236}">
-              <a16:creationId xmlns:a16="http://schemas.microsoft.com/office/drawing/2014/main" id="{5BCD73CA-EFDF-DE20-F70C-9B23B251245F}"/>
-            </a:ext>
-          </a:extLst>
-        </p:cNvPr>
-        <p:cNvGrpSpPr/>
-        <p:nvPr/>
-      </p:nvGrpSpPr>
-      <p:grpSpPr>
-        <a:xfrm>
-          <a:off x="0" y="0"/>
-          <a:ext cx="0" cy="0"/>
-          <a:chOff x="0" y="0"/>
-          <a:chExt cx="0" cy="0"/>
-        </a:xfrm>
-      </p:grpSpPr>
-      <p:sp>
-        <p:nvSpPr>
-          <p:cNvPr id="2" name="Slide Number Placeholder 1">
-            <a:extLst>
-              <a:ext uri="{FF2B5EF4-FFF2-40B4-BE49-F238E27FC236}">
-                <a16:creationId xmlns:a16="http://schemas.microsoft.com/office/drawing/2014/main" id="{1B0634FF-C037-58A0-C233-C98B3D677B64}"/>
-              </a:ext>
-            </a:extLst>
-          </p:cNvPr>
-          <p:cNvSpPr>
-            <a:spLocks noGrp="1"/>
-          </p:cNvSpPr>
-          <p:nvPr>
-            <p:ph type="sldNum" sz="quarter" idx="12"/>
-          </p:nvPr>
-        </p:nvSpPr>
-        <p:spPr>
-          <a:xfrm>
-            <a:off x="11525877" y="6404419"/>
-            <a:ext cx="620843" cy="365125"/>
-          </a:xfrm>
-        </p:spPr>
-        <p:txBody>
-          <a:bodyPr/>
-          <a:lstStyle/>
-          <a:p>
-            <a:fld id="{8FBEC28E-4BEC-434E-A174-17C0E8C4B2B2}" type="slidenum">
-              <a:rPr lang="en-US" smtClean="0"/>
-              <a:pPr/>
-              <a:t>30</a:t>
-            </a:fld>
-            <a:endParaRPr lang="en-US" dirty="0"/>
-          </a:p>
-        </p:txBody>
-      </p:sp>
-      <p:sp>
-        <p:nvSpPr>
-          <p:cNvPr id="10" name="TextBox 9">
-            <a:extLst>
-              <a:ext uri="{FF2B5EF4-FFF2-40B4-BE49-F238E27FC236}">
-                <a16:creationId xmlns:a16="http://schemas.microsoft.com/office/drawing/2014/main" id="{8633FCEF-75CB-24B8-EE13-BA3683B7D706}"/>
-              </a:ext>
-            </a:extLst>
-          </p:cNvPr>
-          <p:cNvSpPr txBox="1"/>
-          <p:nvPr/>
-        </p:nvSpPr>
-        <p:spPr>
-          <a:xfrm>
-            <a:off x="542078" y="84181"/>
-            <a:ext cx="5818771" cy="584775"/>
-          </a:xfrm>
-          <a:prstGeom prst="rect">
-            <a:avLst/>
-          </a:prstGeom>
-          <a:noFill/>
-        </p:spPr>
-        <p:txBody>
-          <a:bodyPr wrap="square" rtlCol="0">
-            <a:spAutoFit/>
-          </a:bodyPr>
-          <a:lstStyle/>
-          <a:p>
-            <a:r>
-              <a:rPr lang="en-US" sz="3200" b="1" dirty="0">
-                <a:solidFill>
-                  <a:srgbClr val="FF0000"/>
-                </a:solidFill>
-              </a:rPr>
-              <a:t>Conclusions</a:t>
-            </a:r>
-          </a:p>
-        </p:txBody>
-      </p:sp>
-      <p:sp>
-        <p:nvSpPr>
-          <p:cNvPr id="3" name="TextBox 2">
-            <a:extLst>
-              <a:ext uri="{FF2B5EF4-FFF2-40B4-BE49-F238E27FC236}">
-                <a16:creationId xmlns:a16="http://schemas.microsoft.com/office/drawing/2014/main" id="{714CF3D9-C1A6-6D56-25BE-5C11EB93871A}"/>
-              </a:ext>
-            </a:extLst>
-          </p:cNvPr>
-          <p:cNvSpPr txBox="1"/>
-          <p:nvPr/>
-        </p:nvSpPr>
-        <p:spPr>
-          <a:xfrm>
-            <a:off x="923731" y="2136710"/>
-            <a:ext cx="9862457" cy="4062651"/>
-          </a:xfrm>
-          <a:prstGeom prst="rect">
-            <a:avLst/>
-          </a:prstGeom>
-          <a:noFill/>
-        </p:spPr>
-        <p:txBody>
-          <a:bodyPr wrap="square" rtlCol="0">
-            <a:spAutoFit/>
-          </a:bodyPr>
-          <a:lstStyle/>
-          <a:p>
-            <a:pPr marL="285750" indent="-285750">
-              <a:buFont typeface="Arial" panose="020B0604020202020204" pitchFamily="34" charset="0"/>
-              <a:buChar char="•"/>
-            </a:pPr>
-            <a:r>
-              <a:rPr lang="en-US" sz="2000" b="1" dirty="0"/>
-              <a:t>Machine Learning Effectiveness-</a:t>
-            </a:r>
-            <a:r>
-              <a:rPr lang="en-US" sz="2000" dirty="0"/>
-              <a:t> ML models successfully predicted the </a:t>
-            </a:r>
-            <a:r>
-              <a:rPr lang="en-US" sz="2000" b="1" dirty="0"/>
-              <a:t>mechanical properties</a:t>
-            </a:r>
-            <a:r>
-              <a:rPr lang="en-US" sz="2000" dirty="0"/>
-              <a:t> of Ni–Cr alloys — including </a:t>
-            </a:r>
-            <a:r>
-              <a:rPr lang="en-US" sz="2000" b="1" dirty="0"/>
-              <a:t>UTS</a:t>
-            </a:r>
-            <a:r>
-              <a:rPr lang="en-US" sz="2000" dirty="0"/>
-              <a:t>, </a:t>
-            </a:r>
-            <a:r>
-              <a:rPr lang="en-US" sz="2000" b="1" dirty="0"/>
-              <a:t>Yield Strength</a:t>
-            </a:r>
-            <a:r>
-              <a:rPr lang="en-US" sz="2000" dirty="0"/>
-              <a:t>, and </a:t>
-            </a:r>
-            <a:r>
-              <a:rPr lang="en-US" sz="2000" b="1" dirty="0"/>
-              <a:t>Young’s Modulus</a:t>
-            </a:r>
-            <a:r>
-              <a:rPr lang="en-US" sz="2000" dirty="0"/>
-              <a:t> — with strong accuracy..</a:t>
-            </a:r>
-          </a:p>
-          <a:p>
-            <a:pPr marL="285750" indent="-285750">
-              <a:buFont typeface="Arial" panose="020B0604020202020204" pitchFamily="34" charset="0"/>
-              <a:buChar char="•"/>
-            </a:pPr>
-            <a:endParaRPr lang="en-US" sz="2000" dirty="0"/>
-          </a:p>
-          <a:p>
-            <a:pPr marL="285750" indent="-285750">
-              <a:buFont typeface="Arial" panose="020B0604020202020204" pitchFamily="34" charset="0"/>
-              <a:buChar char="•"/>
-            </a:pPr>
-            <a:r>
-              <a:rPr lang="en-US" sz="2000" b="1" dirty="0"/>
-              <a:t>High Predictive Power - </a:t>
-            </a:r>
-            <a:r>
-              <a:rPr lang="en-US" sz="2000" dirty="0"/>
-              <a:t>Key properties were successfully predicted with </a:t>
-            </a:r>
-            <a:r>
-              <a:rPr lang="en-US" sz="2000" b="1" dirty="0"/>
-              <a:t>high R^2 </a:t>
-            </a:r>
-            <a:r>
-              <a:rPr lang="en-US" sz="2000" dirty="0"/>
-              <a:t>values </a:t>
-            </a:r>
-            <a:r>
-              <a:rPr lang="en-IN" sz="2000" dirty="0"/>
-              <a:t>, confirming the model’s utility.</a:t>
-            </a:r>
-          </a:p>
-          <a:p>
-            <a:pPr marL="285750" indent="-285750">
-              <a:buFont typeface="Arial" panose="020B0604020202020204" pitchFamily="34" charset="0"/>
-              <a:buChar char="•"/>
-            </a:pPr>
-            <a:endParaRPr lang="en-IN" sz="2000" dirty="0"/>
-          </a:p>
-          <a:p>
-            <a:pPr marL="285750" indent="-285750">
-              <a:buFont typeface="Arial" panose="020B0604020202020204" pitchFamily="34" charset="0"/>
-              <a:buChar char="•"/>
-            </a:pPr>
-            <a:r>
-              <a:rPr lang="en-US" sz="2000" b="1" dirty="0"/>
-              <a:t>Data Source Validation -</a:t>
-            </a:r>
-            <a:r>
-              <a:rPr lang="en-US" sz="2000" dirty="0"/>
-              <a:t> Validated that data generated from </a:t>
-            </a:r>
-            <a:r>
-              <a:rPr lang="en-US" sz="2000" b="1" dirty="0"/>
-              <a:t>Molecular Dynamics (MD) simulations</a:t>
-            </a:r>
-            <a:r>
-              <a:rPr lang="en-US" sz="2000" dirty="0"/>
-              <a:t> is effective and reliable for supervised machine learning tasks.</a:t>
-            </a:r>
-          </a:p>
-          <a:p>
-            <a:pPr marL="285750" indent="-285750">
-              <a:buFont typeface="Arial" panose="020B0604020202020204" pitchFamily="34" charset="0"/>
-              <a:buChar char="•"/>
-            </a:pPr>
-            <a:endParaRPr lang="en-US" sz="2000" dirty="0"/>
-          </a:p>
-          <a:p>
-            <a:pPr marL="285750" indent="-285750">
-              <a:buFont typeface="Arial" panose="020B0604020202020204" pitchFamily="34" charset="0"/>
-              <a:buChar char="•"/>
-            </a:pPr>
-            <a:r>
-              <a:rPr lang="en-US" sz="2000" b="1" dirty="0"/>
-              <a:t>Best Performer Identified -</a:t>
-            </a:r>
-            <a:r>
-              <a:rPr lang="en-US" sz="2000" dirty="0"/>
-              <a:t> </a:t>
-            </a:r>
-            <a:r>
-              <a:rPr lang="en-US" sz="2000" b="1" dirty="0"/>
-              <a:t>Random Forest</a:t>
-            </a:r>
-            <a:r>
-              <a:rPr lang="en-US" sz="2000" dirty="0"/>
-              <a:t> showed the highest overall predictive accuracy and interpretability among the tested models.</a:t>
-            </a:r>
-          </a:p>
-          <a:p>
-            <a:endParaRPr lang="en-IN" sz="2000" dirty="0"/>
-          </a:p>
-        </p:txBody>
-      </p:sp>
-      <p:pic>
-        <p:nvPicPr>
-          <p:cNvPr id="12298" name="Picture 10" descr="Premium Photo | Word Conclusion on torn paper Business concept | Presentation slides design, Torn paper, Slides design">
-            <a:extLst>
-              <a:ext uri="{FF2B5EF4-FFF2-40B4-BE49-F238E27FC236}">
-                <a16:creationId xmlns:a16="http://schemas.microsoft.com/office/drawing/2014/main" id="{C3197244-E4EF-5DEB-735B-461BDBF74CA9}"/>
-              </a:ext>
-            </a:extLst>
-          </p:cNvPr>
-          <p:cNvPicPr>
-            <a:picLocks noChangeAspect="1" noChangeArrowheads="1"/>
-          </p:cNvPicPr>
-          <p:nvPr/>
-        </p:nvPicPr>
-        <p:blipFill>
-          <a:blip r:embed="rId2">
-            <a:extLst>
-              <a:ext uri="{28A0092B-C50C-407E-A947-70E740481C1C}">
-                <a14:useLocalDpi xmlns:a14="http://schemas.microsoft.com/office/drawing/2010/main" val="0"/>
-              </a:ext>
-            </a:extLst>
-          </a:blip>
-          <a:srcRect/>
-          <a:stretch>
-            <a:fillRect/>
-          </a:stretch>
-        </p:blipFill>
-        <p:spPr bwMode="auto">
-          <a:xfrm>
-            <a:off x="9591869" y="804980"/>
-            <a:ext cx="2244429" cy="1093531"/>
-          </a:xfrm>
-          <a:prstGeom prst="rect">
-            <a:avLst/>
-          </a:prstGeom>
-          <a:noFill/>
-          <a:extLst>
-            <a:ext uri="{909E8E84-426E-40DD-AFC4-6F175D3DCCD1}">
-              <a14:hiddenFill xmlns:a14="http://schemas.microsoft.com/office/drawing/2010/main">
-                <a:solidFill>
-                  <a:srgbClr val="FFFFFF"/>
-                </a:solidFill>
-              </a14:hiddenFill>
-            </a:ext>
-          </a:extLst>
-        </p:spPr>
-      </p:pic>
-    </p:spTree>
-    <p:extLst>
-      <p:ext uri="{BB962C8B-B14F-4D97-AF65-F5344CB8AC3E}">
-        <p14:creationId xmlns:p14="http://schemas.microsoft.com/office/powerpoint/2010/main" val="684774973"/>
-      </p:ext>
-    </p:extLst>
-  </p:cSld>
-  <p:clrMapOvr>
-    <a:masterClrMapping/>
-  </p:clrMapOvr>
-</p:sld>
-</file>
-
-<file path=ppt/slides/slide31.xml><?xml version="1.0" encoding="utf-8"?>
-<p:sld xmlns:a="http://schemas.openxmlformats.org/drawingml/2006/main" xmlns:r="http://schemas.openxmlformats.org/officeDocument/2006/relationships" xmlns:p="http://schemas.openxmlformats.org/presentationml/2006/main">
-  <p:cSld>
-    <p:spTree>
-      <p:nvGrpSpPr>
-        <p:cNvPr id="1" name="">
-          <a:extLst>
-            <a:ext uri="{FF2B5EF4-FFF2-40B4-BE49-F238E27FC236}">
-              <a16:creationId xmlns:a16="http://schemas.microsoft.com/office/drawing/2014/main" id="{477ADE3B-9561-493E-0B03-673B6B30F59B}"/>
-            </a:ext>
-          </a:extLst>
-        </p:cNvPr>
-        <p:cNvGrpSpPr/>
-        <p:nvPr/>
-      </p:nvGrpSpPr>
-      <p:grpSpPr>
-        <a:xfrm>
-          <a:off x="0" y="0"/>
-          <a:ext cx="0" cy="0"/>
-          <a:chOff x="0" y="0"/>
-          <a:chExt cx="0" cy="0"/>
-        </a:xfrm>
-      </p:grpSpPr>
-      <p:sp>
-        <p:nvSpPr>
-          <p:cNvPr id="2" name="Slide Number Placeholder 1">
-            <a:extLst>
-              <a:ext uri="{FF2B5EF4-FFF2-40B4-BE49-F238E27FC236}">
-                <a16:creationId xmlns:a16="http://schemas.microsoft.com/office/drawing/2014/main" id="{7DF0DC17-2CAC-5EFA-F662-C5176D1BFA5B}"/>
-              </a:ext>
-            </a:extLst>
-          </p:cNvPr>
-          <p:cNvSpPr>
-            <a:spLocks noGrp="1"/>
-          </p:cNvSpPr>
-          <p:nvPr>
-            <p:ph type="sldNum" sz="quarter" idx="12"/>
-          </p:nvPr>
-        </p:nvSpPr>
-        <p:spPr>
-          <a:xfrm>
-            <a:off x="11525877" y="6404419"/>
-            <a:ext cx="620843" cy="365125"/>
-          </a:xfrm>
-        </p:spPr>
-        <p:txBody>
-          <a:bodyPr/>
-          <a:lstStyle/>
-          <a:p>
-            <a:fld id="{8FBEC28E-4BEC-434E-A174-17C0E8C4B2B2}" type="slidenum">
-              <a:rPr lang="en-US" smtClean="0"/>
-              <a:pPr/>
-              <a:t>31</a:t>
-            </a:fld>
-            <a:endParaRPr lang="en-US" dirty="0"/>
-          </a:p>
-        </p:txBody>
-      </p:sp>
-      <p:sp>
-        <p:nvSpPr>
-          <p:cNvPr id="10" name="TextBox 9">
-            <a:extLst>
-              <a:ext uri="{FF2B5EF4-FFF2-40B4-BE49-F238E27FC236}">
-                <a16:creationId xmlns:a16="http://schemas.microsoft.com/office/drawing/2014/main" id="{98D0883A-217B-575E-86E2-F9E85C979C91}"/>
-              </a:ext>
-            </a:extLst>
-          </p:cNvPr>
-          <p:cNvSpPr txBox="1"/>
-          <p:nvPr/>
-        </p:nvSpPr>
-        <p:spPr>
-          <a:xfrm>
-            <a:off x="542078" y="84181"/>
-            <a:ext cx="5818771" cy="584775"/>
-          </a:xfrm>
-          <a:prstGeom prst="rect">
-            <a:avLst/>
-          </a:prstGeom>
-          <a:noFill/>
-        </p:spPr>
-        <p:txBody>
-          <a:bodyPr wrap="square" rtlCol="0">
-            <a:spAutoFit/>
-          </a:bodyPr>
-          <a:lstStyle/>
-          <a:p>
-            <a:r>
-              <a:rPr lang="en-US" sz="3200" b="1" dirty="0">
-                <a:solidFill>
-                  <a:srgbClr val="FF0000"/>
-                </a:solidFill>
-              </a:rPr>
-              <a:t>References</a:t>
-            </a:r>
-          </a:p>
-        </p:txBody>
-      </p:sp>
-      <p:sp>
-        <p:nvSpPr>
-          <p:cNvPr id="4" name="TextBox 3">
-            <a:extLst>
-              <a:ext uri="{FF2B5EF4-FFF2-40B4-BE49-F238E27FC236}">
-                <a16:creationId xmlns:a16="http://schemas.microsoft.com/office/drawing/2014/main" id="{9DD3EF1E-4221-C6D4-BAF6-0BA618D031A2}"/>
-              </a:ext>
-            </a:extLst>
-          </p:cNvPr>
-          <p:cNvSpPr txBox="1"/>
-          <p:nvPr/>
-        </p:nvSpPr>
-        <p:spPr>
-          <a:xfrm>
-            <a:off x="923731" y="2192694"/>
-            <a:ext cx="9862457" cy="369332"/>
-          </a:xfrm>
-          <a:prstGeom prst="rect">
-            <a:avLst/>
-          </a:prstGeom>
-          <a:noFill/>
-        </p:spPr>
-        <p:txBody>
-          <a:bodyPr wrap="square" rtlCol="0">
-            <a:spAutoFit/>
-          </a:bodyPr>
-          <a:lstStyle/>
-          <a:p>
-            <a:endParaRPr lang="en-IN" dirty="0"/>
-          </a:p>
-        </p:txBody>
-      </p:sp>
-      <p:sp>
-        <p:nvSpPr>
-          <p:cNvPr id="7" name="TextBox 6">
-            <a:extLst>
-              <a:ext uri="{FF2B5EF4-FFF2-40B4-BE49-F238E27FC236}">
-                <a16:creationId xmlns:a16="http://schemas.microsoft.com/office/drawing/2014/main" id="{283D230E-01CE-4005-A418-A24A9D7379F5}"/>
-              </a:ext>
-            </a:extLst>
-          </p:cNvPr>
-          <p:cNvSpPr txBox="1"/>
-          <p:nvPr/>
-        </p:nvSpPr>
-        <p:spPr>
-          <a:xfrm>
-            <a:off x="1819469" y="1754155"/>
-            <a:ext cx="7483151" cy="3170099"/>
-          </a:xfrm>
-          <a:prstGeom prst="rect">
-            <a:avLst/>
-          </a:prstGeom>
-          <a:noFill/>
-        </p:spPr>
-        <p:txBody>
-          <a:bodyPr wrap="square" rtlCol="0">
-            <a:spAutoFit/>
-          </a:bodyPr>
-          <a:lstStyle/>
-          <a:p>
-            <a:pPr marL="285750" indent="-285750">
-              <a:buFont typeface="Arial" panose="020B0604020202020204" pitchFamily="34" charset="0"/>
-              <a:buChar char="•"/>
-            </a:pPr>
-            <a:r>
-              <a:rPr lang="en-US" sz="2000" b="1" dirty="0"/>
-              <a:t>Machine Learning Algorithms:</a:t>
-            </a:r>
-            <a:r>
-              <a:rPr lang="en-US" sz="2000" dirty="0"/>
-              <a:t> Pedregosa, F., et al. (2011), </a:t>
-            </a:r>
-            <a:r>
-              <a:rPr lang="en-US" sz="2000" b="1" dirty="0"/>
-              <a:t>Scikit-learn: Machine Learning in Python, </a:t>
-            </a:r>
-            <a:r>
-              <a:rPr lang="en-US" sz="2000" i="1" dirty="0"/>
-              <a:t>Journal of Machine Learning Research</a:t>
-            </a:r>
-            <a:r>
-              <a:rPr lang="en-US" sz="2000" dirty="0"/>
-              <a:t>, 12, 2825-2830.</a:t>
-            </a:r>
-          </a:p>
-          <a:p>
-            <a:pPr marL="285750" indent="-285750">
-              <a:buFont typeface="Arial" panose="020B0604020202020204" pitchFamily="34" charset="0"/>
-              <a:buChar char="•"/>
-            </a:pPr>
-            <a:endParaRPr lang="en-US" sz="2000" dirty="0"/>
-          </a:p>
-          <a:p>
-            <a:pPr marL="285750" indent="-285750">
-              <a:buFont typeface="Arial" panose="020B0604020202020204" pitchFamily="34" charset="0"/>
-              <a:buChar char="•"/>
-            </a:pPr>
-            <a:r>
-              <a:rPr lang="en-US" sz="2000" b="1" dirty="0"/>
-              <a:t>Random Forest Foundation:</a:t>
-            </a:r>
-            <a:r>
-              <a:rPr lang="en-US" sz="2000" dirty="0"/>
-              <a:t> Breiman, L. (2001). </a:t>
-            </a:r>
-            <a:r>
-              <a:rPr lang="en-US" sz="2000" b="1" dirty="0"/>
-              <a:t>Random Forests.</a:t>
-            </a:r>
-            <a:r>
-              <a:rPr lang="en-US" sz="2000" dirty="0"/>
-              <a:t> </a:t>
-            </a:r>
-            <a:r>
-              <a:rPr lang="en-US" sz="2000" i="1" dirty="0"/>
-              <a:t>Machine Learning</a:t>
-            </a:r>
-            <a:r>
-              <a:rPr lang="en-US" sz="2000" dirty="0"/>
-              <a:t>, 45(1), 5-32.</a:t>
-            </a:r>
-          </a:p>
-          <a:p>
-            <a:pPr marL="285750" indent="-285750">
-              <a:buFont typeface="Arial" panose="020B0604020202020204" pitchFamily="34" charset="0"/>
-              <a:buChar char="•"/>
-            </a:pPr>
-            <a:endParaRPr lang="en-US" sz="2000" dirty="0"/>
-          </a:p>
-          <a:p>
-            <a:pPr marL="285750" indent="-285750">
-              <a:buFont typeface="Arial" panose="020B0604020202020204" pitchFamily="34" charset="0"/>
-              <a:buChar char="•"/>
-            </a:pPr>
-            <a:r>
-              <a:rPr lang="en-IN" sz="2000" b="1" dirty="0"/>
-              <a:t>MD Simulation Data Source:  </a:t>
-            </a:r>
-            <a:r>
-              <a:rPr lang="en-IN" sz="2000" b="1" dirty="0">
-                <a:hlinkClick r:id="rId2"/>
-              </a:rPr>
-              <a:t>MD Simulation Github</a:t>
-            </a:r>
-            <a:endParaRPr lang="en-IN" sz="2000" dirty="0"/>
-          </a:p>
-          <a:p>
-            <a:pPr marL="285750" indent="-285750">
-              <a:buFont typeface="Arial" panose="020B0604020202020204" pitchFamily="34" charset="0"/>
-              <a:buChar char="•"/>
-            </a:pPr>
-            <a:endParaRPr lang="en-IN" sz="2000" dirty="0"/>
-          </a:p>
-          <a:p>
-            <a:pPr marL="285750" indent="-285750">
-              <a:buFont typeface="Arial" panose="020B0604020202020204" pitchFamily="34" charset="0"/>
-              <a:buChar char="•"/>
-            </a:pPr>
-            <a:r>
-              <a:rPr lang="en-IN" sz="2000" dirty="0"/>
-              <a:t>Project Github Repo: 	</a:t>
-            </a:r>
-            <a:r>
-              <a:rPr lang="en-IN" sz="2000" dirty="0">
-                <a:hlinkClick r:id="rId3"/>
-              </a:rPr>
-              <a:t>MLMI_Project </a:t>
-            </a:r>
-            <a:endParaRPr lang="en-IN" sz="2000" dirty="0"/>
-          </a:p>
-        </p:txBody>
-      </p:sp>
-    </p:spTree>
-    <p:extLst>
-      <p:ext uri="{BB962C8B-B14F-4D97-AF65-F5344CB8AC3E}">
-        <p14:creationId xmlns:p14="http://schemas.microsoft.com/office/powerpoint/2010/main" val="662604587"/>
-      </p:ext>
-    </p:extLst>
-  </p:cSld>
-  <p:clrMapOvr>
-    <a:masterClrMapping/>
-  </p:clrMapOvr>
-</p:sld>
-</file>
-
 <file path=ppt/slides/slide4.xml><?xml version="1.0" encoding="utf-8"?>
 <p:sld xmlns:a="http://schemas.openxmlformats.org/drawingml/2006/main" xmlns:r="http://schemas.openxmlformats.org/officeDocument/2006/relationships" xmlns:p="http://schemas.openxmlformats.org/presentationml/2006/main">
   <p:cSld>
@@ -15080,7 +14206,7 @@
         </p:spPr>
         <p:txBody>
           <a:bodyPr vert="horz" lIns="91440" tIns="45720" rIns="91440" bIns="45720" rtlCol="0">
-            <a:normAutofit lnSpcReduction="10000"/>
+            <a:normAutofit/>
           </a:bodyPr>
           <a:lstStyle>
             <a:lvl1pPr marL="342900" indent="-342900" algn="l" defTabSz="457200" rtl="0" eaLnBrk="1" latinLnBrk="0" hangingPunct="1">
@@ -15268,39 +14394,17 @@
             <a:pPr lvl="1"/>
             <a:r>
               <a:rPr sz="2000" dirty="0"/>
-              <a:t>Combining atomistic simulations with ML enables property prediction across composition and conditions.</a:t>
+              <a:t>Combining </a:t>
+            </a:r>
+            <a:r>
+              <a:rPr lang="en-IN" sz="2000" dirty="0"/>
+              <a:t>MD</a:t>
+            </a:r>
+            <a:r>
+              <a:rPr sz="2000" dirty="0"/>
+              <a:t> simulations with ML enables property prediction across composition and conditions.</a:t>
             </a:r>
             <a:endParaRPr lang="en-IN" sz="2000" dirty="0"/>
-          </a:p>
-          <a:p>
-            <a:pPr marL="457200" lvl="1" indent="0">
-              <a:buNone/>
-            </a:pPr>
-            <a:endParaRPr lang="en-IN" sz="2000" dirty="0"/>
-          </a:p>
-          <a:p>
-            <a:pPr lvl="1"/>
-            <a:r>
-              <a:rPr lang="en-US" sz="2000" dirty="0"/>
-              <a:t>This integrated approach helps </a:t>
-            </a:r>
-            <a:r>
-              <a:rPr lang="en-US" sz="2000" b="1" dirty="0"/>
-              <a:t>accelerate alloy design</a:t>
-            </a:r>
-            <a:r>
-              <a:rPr lang="en-US" sz="2000" dirty="0"/>
-              <a:t>, making the process more </a:t>
-            </a:r>
-            <a:r>
-              <a:rPr lang="en-US" sz="2000" b="1" dirty="0"/>
-              <a:t>data-driven, scalable, and efficient</a:t>
-            </a:r>
-            <a:r>
-              <a:rPr lang="en-US" sz="2000" dirty="0"/>
-              <a:t>.</a:t>
-            </a:r>
-            <a:endParaRPr sz="2000" dirty="0"/>
           </a:p>
         </p:txBody>
       </p:sp>
@@ -15933,8 +15037,8 @@
         </p:nvSpPr>
         <p:spPr>
           <a:xfrm>
-            <a:off x="447567" y="104578"/>
-            <a:ext cx="6099858" cy="584775"/>
+            <a:off x="447566" y="104578"/>
+            <a:ext cx="6690351" cy="584775"/>
           </a:xfrm>
           <a:prstGeom prst="rect">
             <a:avLst/>
@@ -15953,7 +15057,7 @@
                   <a:srgbClr val="FF0000"/>
                 </a:solidFill>
               </a:rPr>
-              <a:t>Properties Predicting</a:t>
+              <a:t>Mechanical Properties of Ni-Cr alloy</a:t>
             </a:r>
           </a:p>
         </p:txBody>
@@ -16391,7 +15495,7 @@
                   <a:srgbClr val="FF0000"/>
                 </a:solidFill>
               </a:rPr>
-              <a:t>Data Generation Process</a:t>
+              <a:t>Data Generation Pipeline</a:t>
             </a:r>
           </a:p>
         </p:txBody>
@@ -18062,7 +17166,7 @@
         <p:spPr>
           <a:xfrm>
             <a:off x="1034142" y="918429"/>
-            <a:ext cx="8686800" cy="646331"/>
+            <a:ext cx="8686800" cy="954107"/>
           </a:xfrm>
           <a:prstGeom prst="rect">
             <a:avLst/>
@@ -18077,8 +17181,14 @@
           <a:p>
             <a:r>
               <a:rPr lang="en-US" dirty="0"/>
-              <a:t>The raw stress-strain curve data is then analyzed to extract the target mechanical properties</a:t>
+              <a:t>The raw stress-strain curve data is then analyzed to extract the target mechanical properties. </a:t>
             </a:r>
+            <a:r>
+              <a:rPr lang="en-IN" dirty="0"/>
+              <a:t>Joblib files generated after processing data</a:t>
+            </a:r>
+          </a:p>
+          <a:p>
             <a:endParaRPr lang="en-IN" dirty="0"/>
           </a:p>
         </p:txBody>
@@ -18145,13 +17255,13 @@
           <p:nvPr>
             <p:extLst>
               <p:ext uri="{D42A27DB-BD31-4B8C-83A1-F6EECF244321}">
-                <p14:modId xmlns:p14="http://schemas.microsoft.com/office/powerpoint/2010/main" val="2414734967"/>
+                <p14:modId xmlns:p14="http://schemas.microsoft.com/office/powerpoint/2010/main" val="2342670255"/>
               </p:ext>
             </p:extLst>
           </p:nvPr>
         </p:nvGraphicFramePr>
         <p:xfrm>
-          <a:off x="570640" y="1564760"/>
+          <a:off x="486665" y="1564760"/>
           <a:ext cx="8412177" cy="4754880"/>
         </p:xfrm>
         <a:graphic>
